--- a/제출물_영상/임원보고_발표대본.pptx
+++ b/제출물_영상/임원보고_발표대본.pptx
@@ -9,6 +9,7 @@
     <p:sldId id="257" r:id="rId3"/>
     <p:sldId id="258" r:id="rId4"/>
     <p:sldId id="259" r:id="rId5"/>
+    <p:sldId id="270" r:id="rId12"/>
     <p:sldId id="260" r:id="rId6"/>
     <p:sldId id="261" r:id="rId7"/>
     <p:sldId id="262" r:id="rId8"/>
@@ -18,6 +19,7 @@
     <p:sldId id="265" r:id="rId11"/>
     <p:sldId id="267" r:id="rId13"/>
     <p:sldId id="268" r:id="rId14"/>
+    <p:sldId id="271" r:id="rId21"/>
   </p:sldIdLst>
   <p:notesMasterIdLst>
     <p:notesMasterId r:id="rId15"/>
@@ -2172,13 +2174,13 @@
       </p:sp>
       <p:sp>
         <p:nvSpPr>
-          <p:cNvPr id="10" name="Shape 7"/>
+          <p:cNvPr id="13" name="Shape 10"/>
           <p:cNvSpPr/>
           <p:nvPr/>
         </p:nvSpPr>
         <p:spPr>
           <a:xfrm>
-            <a:off x="3200400" y="4983480"/>
+            <a:off x="3204210" y="4983480"/>
             <a:ext cx="2377440" cy="960120"/>
           </a:xfrm>
           <a:prstGeom prst="roundRect">
@@ -2203,13 +2205,13 @@
       </p:sp>
       <p:sp>
         <p:nvSpPr>
-          <p:cNvPr id="11" name="Text 8"/>
-          <p:cNvSpPr txBox="1"/>
-          <p:nvPr/>
-        </p:nvSpPr>
-        <p:spPr>
-          <a:xfrm>
-            <a:off x="3383280" y="5029200"/>
+          <p:cNvPr id="14" name="Text 11"/>
+          <p:cNvSpPr txBox="1"/>
+          <p:nvPr/>
+        </p:nvSpPr>
+        <p:spPr>
+          <a:xfrm>
+            <a:off x="3387090" y="5029200"/>
             <a:ext cx="2011680" cy="502920"/>
           </a:xfrm>
           <a:prstGeom prst="rect">
@@ -2234,7 +2236,7 @@
                 <a:ea typeface="Pretendard" pitchFamily="34" charset="-122"/>
                 <a:cs typeface="Pretendard" pitchFamily="34" charset="-120"/>
               </a:rPr>
-              <a:t>86.7%</a:t>
+              <a:t>90% 이상</a:t>
             </a:r>
             <a:endParaRPr lang="en-US" sz="2400" dirty="0"/>
           </a:p>
@@ -2242,122 +2244,13 @@
       </p:sp>
       <p:sp>
         <p:nvSpPr>
-          <p:cNvPr id="12" name="Text 9"/>
-          <p:cNvSpPr txBox="1"/>
-          <p:nvPr/>
-        </p:nvSpPr>
-        <p:spPr>
-          <a:xfrm>
-            <a:off x="3383280" y="5532120"/>
-            <a:ext cx="2011680" cy="365760"/>
-          </a:xfrm>
-          <a:prstGeom prst="rect">
-            <a:avLst/>
-          </a:prstGeom>
-          <a:noFill/>
-          <a:ln/>
-        </p:spPr>
-        <p:txBody>
-          <a:bodyPr wrap="square" lIns="0" tIns="0" rIns="0" bIns="0" rtlCol="0" anchor="t"/>
-          <a:lstStyle/>
-          <a:p>
-            <a:pPr indent="0" marL="0">
-              <a:buNone/>
-            </a:pPr>
-            <a:r>
-              <a:rPr lang="en-US" sz="1050" dirty="0">
-                <a:solidFill>
-                  <a:srgbClr val="D0D0CE"/>
-                </a:solidFill>
-                <a:latin typeface="Pretendard" pitchFamily="34" charset="0"/>
-                <a:ea typeface="Pretendard" pitchFamily="34" charset="-122"/>
-                <a:cs typeface="Pretendard" pitchFamily="34" charset="-120"/>
-              </a:rPr>
-              <a:t>20시간 용량 일치 (52/60) · 기준 90% 미달</a:t>
-            </a:r>
-            <a:endParaRPr lang="en-US" sz="1050" dirty="0"/>
-          </a:p>
-        </p:txBody>
-      </p:sp>
-      <p:sp>
-        <p:nvSpPr>
-          <p:cNvPr id="13" name="Shape 10"/>
-          <p:cNvSpPr/>
-          <p:nvPr/>
-        </p:nvSpPr>
-        <p:spPr>
-          <a:xfrm>
-            <a:off x="5852160" y="4983480"/>
-            <a:ext cx="2377440" cy="960120"/>
-          </a:xfrm>
-          <a:prstGeom prst="roundRect">
-            <a:avLst>
-              <a:gd name="adj" fmla="val 7619"/>
-            </a:avLst>
-          </a:prstGeom>
-          <a:solidFill>
-            <a:srgbClr val="333F48"/>
-          </a:solidFill>
-          <a:ln w="6350">
-            <a:solidFill>
-              <a:srgbClr val="A2AAAD"/>
-            </a:solidFill>
-            <a:prstDash val="solid"/>
-          </a:ln>
-        </p:spPr>
-        <p:txBody>
-          <a:bodyPr/>
-          <a:p/>
-        </p:txBody>
-      </p:sp>
-      <p:sp>
-        <p:nvSpPr>
-          <p:cNvPr id="14" name="Text 11"/>
-          <p:cNvSpPr txBox="1"/>
-          <p:nvPr/>
-        </p:nvSpPr>
-        <p:spPr>
-          <a:xfrm>
-            <a:off x="6035040" y="5029200"/>
-            <a:ext cx="2011680" cy="502920"/>
-          </a:xfrm>
-          <a:prstGeom prst="rect">
-            <a:avLst/>
-          </a:prstGeom>
-          <a:noFill/>
-          <a:ln/>
-        </p:spPr>
-        <p:txBody>
-          <a:bodyPr wrap="square" lIns="0" tIns="0" rIns="0" bIns="0" rtlCol="0" anchor="ctr"/>
-          <a:lstStyle/>
-          <a:p>
-            <a:pPr indent="0" marL="0">
-              <a:buNone/>
-            </a:pPr>
-            <a:r>
-              <a:rPr lang="en-US" sz="2400" b="1" dirty="0">
-                <a:solidFill>
-                  <a:srgbClr val="0097A9"/>
-                </a:solidFill>
-                <a:latin typeface="Pretendard" pitchFamily="34" charset="0"/>
-                <a:ea typeface="Pretendard" pitchFamily="34" charset="-122"/>
-                <a:cs typeface="Pretendard" pitchFamily="34" charset="-120"/>
-              </a:rPr>
-              <a:t>90% 이상</a:t>
-            </a:r>
-            <a:endParaRPr lang="en-US" sz="2400" dirty="0"/>
-          </a:p>
-        </p:txBody>
-      </p:sp>
-      <p:sp>
-        <p:nvSpPr>
           <p:cNvPr id="15" name="Text 12"/>
           <p:cNvSpPr txBox="1"/>
           <p:nvPr/>
         </p:nvSpPr>
         <p:spPr>
           <a:xfrm>
-            <a:off x="6035040" y="5532120"/>
+            <a:off x="3387090" y="5532120"/>
             <a:ext cx="2011680" cy="365760"/>
           </a:xfrm>
           <a:prstGeom prst="rect">
@@ -2421,7 +2314,7 @@
                 <a:ea typeface="Pretendard" pitchFamily="34" charset="-122"/>
                 <a:cs typeface="Pretendard" pitchFamily="34" charset="-120"/>
               </a:rPr>
-              <a:t>발표자  창원품질경영팀 김경준 주임        구성  직접 발표 + 영상(약 2분 37초)        일자  2026-10-21</a:t>
+              <a:t>발표자  창원품질경영팀 김경준 주임        구성  직접 발표 + 영상(약 3분 22초)        일자  2026-10-22</a:t>
             </a:r>
             <a:pPr indent="0" marL="0">
               <a:buNone/>
@@ -2475,7 +2368,7 @@
                 <a:ea typeface="Pretendard" pitchFamily="34" charset="-122"/>
                 <a:cs typeface="Pretendard" pitchFamily="34" charset="-120"/>
               </a:rPr>
-              <a:t>1 / 13</a:t>
+              <a:t>1 / 15</a:t>
             </a:r>
             <a:endParaRPr lang="en-US" sz="900" dirty="0"/>
           </a:p>
@@ -2490,6 +2383,635 @@
 </file>
 
 <file path=ppt/slides/slide10.xml><?xml version="1.0" encoding="utf-8"?>
+<p:sld xmlns:a="http://schemas.openxmlformats.org/drawingml/2006/main" xmlns:r="http://schemas.openxmlformats.org/officeDocument/2006/relationships" xmlns:p="http://schemas.openxmlformats.org/presentationml/2006/main">
+  <p:cSld name="Slide 8">
+    <p:bg>
+      <p:bgPr>
+        <a:solidFill>
+          <a:srgbClr val="FFFFFF"/>
+        </a:solidFill>
+      </p:bgPr>
+    </p:bg>
+    <p:spTree>
+      <p:nvGrpSpPr>
+        <p:cNvPr id="1" name=""/>
+        <p:cNvGrpSpPr/>
+        <p:nvPr/>
+      </p:nvGrpSpPr>
+      <p:grpSpPr>
+        <a:xfrm>
+          <a:off x="0" y="0"/>
+          <a:ext cx="0" cy="0"/>
+          <a:chOff x="0" y="0"/>
+          <a:chExt cx="0" cy="0"/>
+        </a:xfrm>
+      </p:grpSpPr>
+      <p:pic>
+        <p:nvPicPr>
+          <p:cNvPr id="2" name="Image 0" descr="/Users/junny_macbook/.claude/skills/sebang-deck/assets/sebang_wordmark_dark.png">    </p:cNvPr>
+          <p:cNvPicPr>
+            <a:picLocks noChangeAspect="1"/>
+          </p:cNvPicPr>
+          <p:nvPr/>
+        </p:nvPicPr>
+        <p:blipFill>
+          <a:blip r:embed="rId1"/>
+          <a:stretch>
+            <a:fillRect/>
+          </a:stretch>
+        </p:blipFill>
+        <p:spPr>
+          <a:xfrm>
+            <a:off x="548640" y="292608"/>
+            <a:ext cx="868680" cy="185801"/>
+          </a:xfrm>
+          <a:prstGeom prst="rect">
+            <a:avLst/>
+          </a:prstGeom>
+        </p:spPr>
+      </p:pic>
+      <p:sp>
+        <p:nvSpPr>
+          <p:cNvPr id="3" name="Text 0"/>
+          <p:cNvSpPr txBox="1"/>
+          <p:nvPr/>
+        </p:nvSpPr>
+        <p:spPr>
+          <a:xfrm>
+            <a:off x="1572768" y="256032"/>
+            <a:ext cx="5486400" cy="274320"/>
+          </a:xfrm>
+          <a:prstGeom prst="rect">
+            <a:avLst/>
+          </a:prstGeom>
+          <a:noFill/>
+          <a:ln/>
+        </p:spPr>
+        <p:txBody>
+          <a:bodyPr wrap="square" lIns="0" tIns="0" rIns="0" bIns="0" rtlCol="0" anchor="ctr"/>
+          <a:lstStyle/>
+          <a:p>
+            <a:pPr indent="0" marL="0">
+              <a:buNone/>
+            </a:pPr>
+            <a:r>
+              <a:rPr lang="en-US" sz="950" dirty="0">
+                <a:solidFill>
+                  <a:srgbClr val="717779"/>
+                </a:solidFill>
+                <a:latin typeface="Pretendard" pitchFamily="34" charset="0"/>
+                <a:ea typeface="Pretendard" pitchFamily="34" charset="-122"/>
+                <a:cs typeface="Pretendard" pitchFamily="34" charset="-120"/>
+              </a:rPr>
+              <a:t>창원품질경영팀 · 임원 보고</a:t>
+            </a:r>
+            <a:endParaRPr lang="en-US" sz="950" dirty="0"/>
+          </a:p>
+        </p:txBody>
+      </p:sp>
+      <p:sp>
+        <p:nvSpPr>
+          <p:cNvPr id="4" name="Text 1"/>
+          <p:cNvSpPr txBox="1"/>
+          <p:nvPr/>
+        </p:nvSpPr>
+        <p:spPr>
+          <a:xfrm>
+            <a:off x="548640" y="6400800"/>
+            <a:ext cx="7315200" cy="228600"/>
+          </a:xfrm>
+          <a:prstGeom prst="rect">
+            <a:avLst/>
+          </a:prstGeom>
+          <a:noFill/>
+          <a:ln/>
+        </p:spPr>
+        <p:txBody>
+          <a:bodyPr wrap="square" lIns="0" tIns="0" rIns="0" bIns="0" rtlCol="0" anchor="ctr"/>
+          <a:lstStyle/>
+          <a:p>
+            <a:pPr indent="0" marL="0">
+              <a:buNone/>
+            </a:pPr>
+            <a:r>
+              <a:rPr lang="en-US" sz="900" dirty="0">
+                <a:solidFill>
+                  <a:srgbClr val="717779"/>
+                </a:solidFill>
+                <a:latin typeface="Pretendard" pitchFamily="34" charset="0"/>
+                <a:ea typeface="Pretendard" pitchFamily="34" charset="-122"/>
+                <a:cs typeface="Pretendard" pitchFamily="34" charset="-120"/>
+              </a:rPr>
+              <a:t>창원품질경영팀 김경준 주임  ·  AI 포화도 예측  ·  발표 대본</a:t>
+            </a:r>
+            <a:endParaRPr lang="en-US" sz="900" dirty="0"/>
+          </a:p>
+        </p:txBody>
+      </p:sp>
+      <p:sp>
+        <p:nvSpPr>
+          <p:cNvPr id="5" name="Text 2"/>
+          <p:cNvSpPr txBox="1"/>
+          <p:nvPr/>
+        </p:nvSpPr>
+        <p:spPr>
+          <a:xfrm>
+            <a:off x="10545775" y="6400800"/>
+            <a:ext cx="1097280" cy="228600"/>
+          </a:xfrm>
+          <a:prstGeom prst="rect">
+            <a:avLst/>
+          </a:prstGeom>
+          <a:noFill/>
+          <a:ln/>
+        </p:spPr>
+        <p:txBody>
+          <a:bodyPr wrap="square" lIns="0" tIns="0" rIns="0" bIns="0" rtlCol="0" anchor="ctr"/>
+          <a:lstStyle/>
+          <a:p>
+            <a:pPr algn="r" indent="0" marL="0">
+              <a:buNone/>
+            </a:pPr>
+            <a:r>
+              <a:rPr lang="en-US" sz="900" dirty="0">
+                <a:solidFill>
+                  <a:srgbClr val="717779"/>
+                </a:solidFill>
+                <a:latin typeface="Pretendard" pitchFamily="34" charset="0"/>
+                <a:ea typeface="Pretendard" pitchFamily="34" charset="-122"/>
+                <a:cs typeface="Pretendard" pitchFamily="34" charset="-120"/>
+              </a:rPr>
+              <a:t>10 / 15</a:t>
+            </a:r>
+            <a:endParaRPr lang="en-US" sz="900" dirty="0"/>
+          </a:p>
+        </p:txBody>
+      </p:sp>
+      <p:sp>
+        <p:nvSpPr>
+          <p:cNvPr id="6" name="Text 3"/>
+          <p:cNvSpPr txBox="1"/>
+          <p:nvPr/>
+        </p:nvSpPr>
+        <p:spPr>
+          <a:xfrm>
+            <a:off x="548640" y="658368"/>
+            <a:ext cx="11094415" cy="493776"/>
+          </a:xfrm>
+          <a:prstGeom prst="rect">
+            <a:avLst/>
+          </a:prstGeom>
+          <a:noFill/>
+          <a:ln/>
+        </p:spPr>
+        <p:txBody>
+          <a:bodyPr wrap="square" lIns="0" tIns="0" rIns="0" bIns="0" rtlCol="0" anchor="ctr"/>
+          <a:lstStyle/>
+          <a:p>
+            <a:pPr indent="0" marL="0">
+              <a:buNone/>
+            </a:pPr>
+            <a:r>
+              <a:rPr lang="en-US" sz="2600" b="1" dirty="0">
+                <a:solidFill>
+                  <a:srgbClr val="333F48"/>
+                </a:solidFill>
+                <a:latin typeface="Pretendard" pitchFamily="34" charset="0"/>
+                <a:ea typeface="Pretendard" pitchFamily="34" charset="-122"/>
+                <a:cs typeface="Pretendard" pitchFamily="34" charset="-120"/>
+              </a:rPr>
+              <a:t>6. 시험 없이 나머지 로트까지 (확장 예측)</a:t>
+            </a:r>
+            <a:endParaRPr lang="en-US" sz="2600" dirty="0"/>
+          </a:p>
+        </p:txBody>
+      </p:sp>
+      <p:sp>
+        <p:nvSpPr>
+          <p:cNvPr id="7" name="Text 4"/>
+          <p:cNvSpPr txBox="1"/>
+          <p:nvPr/>
+        </p:nvSpPr>
+        <p:spPr>
+          <a:xfrm>
+            <a:off x="548640" y="1152144"/>
+            <a:ext cx="11094415" cy="329184"/>
+          </a:xfrm>
+          <a:prstGeom prst="rect">
+            <a:avLst/>
+          </a:prstGeom>
+          <a:noFill/>
+          <a:ln/>
+        </p:spPr>
+        <p:txBody>
+          <a:bodyPr wrap="square" lIns="0" tIns="0" rIns="0" bIns="0" rtlCol="0" anchor="ctr"/>
+          <a:lstStyle/>
+          <a:p>
+            <a:pPr indent="0" marL="0">
+              <a:buNone/>
+            </a:pPr>
+            <a:r>
+              <a:rPr lang="en-US" sz="1400" b="1" dirty="0">
+                <a:solidFill>
+                  <a:srgbClr val="006A76"/>
+                </a:solidFill>
+                <a:latin typeface="Pretendard" pitchFamily="34" charset="0"/>
+                <a:ea typeface="Pretendard" pitchFamily="34" charset="-122"/>
+                <a:cs typeface="Pretendard" pitchFamily="34" charset="-120"/>
+              </a:rPr>
+              <a:t>시험을 여러 번 돌리지 않아도 전체 로트의 결과를 한 번에 확인한다</a:t>
+            </a:r>
+            <a:endParaRPr lang="en-US" sz="1400" dirty="0"/>
+          </a:p>
+        </p:txBody>
+      </p:sp>
+      <p:sp>
+        <p:nvSpPr>
+          <p:cNvPr id="8" name="Shape 5"/>
+          <p:cNvSpPr/>
+          <p:nvPr/>
+        </p:nvSpPr>
+        <p:spPr>
+          <a:xfrm>
+            <a:off x="548640" y="1664208"/>
+            <a:ext cx="5410048" cy="3246120"/>
+          </a:xfrm>
+          <a:prstGeom prst="roundRect">
+            <a:avLst>
+              <a:gd name="adj" fmla="val 2254"/>
+            </a:avLst>
+          </a:prstGeom>
+          <a:solidFill>
+            <a:srgbClr val="FFFFFF"/>
+          </a:solidFill>
+          <a:ln w="9525">
+            <a:solidFill>
+              <a:srgbClr val="D0D0CE"/>
+            </a:solidFill>
+            <a:prstDash val="solid"/>
+          </a:ln>
+        </p:spPr>
+        <p:txBody>
+          <a:bodyPr/>
+          <a:p/>
+        </p:txBody>
+      </p:sp>
+      <p:sp>
+        <p:nvSpPr>
+          <p:cNvPr id="9" name="Text 6"/>
+          <p:cNvSpPr txBox="1"/>
+          <p:nvPr/>
+        </p:nvSpPr>
+        <p:spPr>
+          <a:xfrm>
+            <a:off x="749808" y="1847088"/>
+            <a:ext cx="5007712" cy="219456"/>
+          </a:xfrm>
+          <a:prstGeom prst="rect">
+            <a:avLst/>
+          </a:prstGeom>
+          <a:noFill/>
+          <a:ln/>
+        </p:spPr>
+        <p:txBody>
+          <a:bodyPr wrap="square" lIns="0" tIns="0" rIns="0" bIns="0" rtlCol="0" anchor="t"/>
+          <a:lstStyle/>
+          <a:p>
+            <a:pPr indent="0" marL="0">
+              <a:buNone/>
+            </a:pPr>
+            <a:r>
+              <a:rPr lang="en-US" sz="950" b="1" dirty="0">
+                <a:solidFill>
+                  <a:srgbClr val="006A76"/>
+                </a:solidFill>
+                <a:latin typeface="Pretendard" pitchFamily="34" charset="0"/>
+                <a:ea typeface="Pretendard" pitchFamily="34" charset="-122"/>
+                <a:cs typeface="Pretendard" pitchFamily="34" charset="-120"/>
+              </a:rPr>
+              <a:t>영상 나레이션 · 1/2</a:t>
+            </a:r>
+            <a:endParaRPr lang="en-US" sz="950" dirty="0"/>
+          </a:p>
+        </p:txBody>
+      </p:sp>
+      <p:sp>
+        <p:nvSpPr>
+          <p:cNvPr id="10" name="Text 7"/>
+          <p:cNvSpPr txBox="1"/>
+          <p:nvPr/>
+        </p:nvSpPr>
+        <p:spPr>
+          <a:xfrm>
+            <a:off x="749808" y="2103120"/>
+            <a:ext cx="5007712" cy="566928"/>
+          </a:xfrm>
+          <a:prstGeom prst="rect">
+            <a:avLst/>
+          </a:prstGeom>
+          <a:noFill/>
+          <a:ln/>
+        </p:spPr>
+        <p:txBody>
+          <a:bodyPr wrap="square" lIns="0" tIns="0" rIns="0" bIns="0" rtlCol="0" anchor="t"/>
+          <a:lstStyle/>
+          <a:p>
+            <a:pPr indent="0" marL="0">
+              <a:buNone/>
+            </a:pPr>
+            <a:r>
+              <a:rPr lang="en-US" sz="1400" b="1" dirty="0">
+                <a:solidFill>
+                  <a:srgbClr val="333F48"/>
+                </a:solidFill>
+                <a:latin typeface="Pretendard" pitchFamily="34" charset="0"/>
+                <a:ea typeface="Pretendard" pitchFamily="34" charset="-122"/>
+                <a:cs typeface="Pretendard" pitchFamily="34" charset="-120"/>
+              </a:rPr>
+              <a:t>앞부분</a:t>
+            </a:r>
+            <a:endParaRPr lang="en-US" sz="1400" dirty="0"/>
+          </a:p>
+        </p:txBody>
+      </p:sp>
+      <p:sp>
+        <p:nvSpPr>
+          <p:cNvPr id="11" name="Text 8"/>
+          <p:cNvSpPr txBox="1"/>
+          <p:nvPr/>
+        </p:nvSpPr>
+        <p:spPr>
+          <a:xfrm>
+            <a:off x="749808" y="2724912"/>
+            <a:ext cx="5007712" cy="2039112"/>
+          </a:xfrm>
+          <a:prstGeom prst="rect">
+            <a:avLst/>
+          </a:prstGeom>
+          <a:noFill/>
+          <a:ln/>
+        </p:spPr>
+        <p:txBody>
+          <a:bodyPr wrap="square" lIns="0" tIns="0" rIns="0" bIns="0" rtlCol="0" anchor="t"/>
+          <a:lstStyle/>
+          <a:p>
+            <a:pPr indent="0" marL="0">
+              <a:lnSpc>
+                <a:spcPct val="125000"/>
+              </a:lnSpc>
+              <a:spcAft>
+                <a:spcPts val="400"/>
+              </a:spcAft>
+              <a:buNone/>
+            </a:pPr>
+            <a:r>
+              <a:rPr lang="en-US" sz="1150" dirty="0">
+                <a:solidFill>
+                  <a:srgbClr val="333F48"/>
+                </a:solidFill>
+                <a:latin typeface="Pretendard" pitchFamily="34" charset="0"/>
+                <a:ea typeface="Pretendard" pitchFamily="34" charset="-122"/>
+                <a:cs typeface="Pretendard" pitchFamily="34" charset="-120"/>
+              </a:rPr>
+              <a:t>그리고 이것이 가장 큰 장점입니다. 성능 시험을 마친 제품으로 학습해서, 아직 시험하지 않은 나머지 로트의 20시간 용량까지 미리 예측합니다.</a:t>
+            </a:r>
+            <a:endParaRPr lang="en-US" sz="1150" dirty="0"/>
+          </a:p>
+        </p:txBody>
+      </p:sp>
+      <p:sp>
+        <p:nvSpPr>
+          <p:cNvPr id="12" name="Shape 9"/>
+          <p:cNvSpPr/>
+          <p:nvPr/>
+        </p:nvSpPr>
+        <p:spPr>
+          <a:xfrm>
+            <a:off x="6233008" y="1664208"/>
+            <a:ext cx="5410048" cy="3246120"/>
+          </a:xfrm>
+          <a:prstGeom prst="roundRect">
+            <a:avLst>
+              <a:gd name="adj" fmla="val 2254"/>
+            </a:avLst>
+          </a:prstGeom>
+          <a:solidFill>
+            <a:srgbClr val="FFFFFF"/>
+          </a:solidFill>
+          <a:ln w="9525">
+            <a:solidFill>
+              <a:srgbClr val="D0D0CE"/>
+            </a:solidFill>
+            <a:prstDash val="solid"/>
+          </a:ln>
+        </p:spPr>
+        <p:txBody>
+          <a:bodyPr/>
+          <a:p/>
+        </p:txBody>
+      </p:sp>
+      <p:sp>
+        <p:nvSpPr>
+          <p:cNvPr id="13" name="Text 10"/>
+          <p:cNvSpPr txBox="1"/>
+          <p:nvPr/>
+        </p:nvSpPr>
+        <p:spPr>
+          <a:xfrm>
+            <a:off x="6434176" y="1847088"/>
+            <a:ext cx="5007712" cy="219456"/>
+          </a:xfrm>
+          <a:prstGeom prst="rect">
+            <a:avLst/>
+          </a:prstGeom>
+          <a:noFill/>
+          <a:ln/>
+        </p:spPr>
+        <p:txBody>
+          <a:bodyPr wrap="square" lIns="0" tIns="0" rIns="0" bIns="0" rtlCol="0" anchor="t"/>
+          <a:lstStyle/>
+          <a:p>
+            <a:pPr indent="0" marL="0">
+              <a:buNone/>
+            </a:pPr>
+            <a:r>
+              <a:rPr lang="en-US" sz="950" b="1" dirty="0">
+                <a:solidFill>
+                  <a:srgbClr val="006A76"/>
+                </a:solidFill>
+                <a:latin typeface="Pretendard" pitchFamily="34" charset="0"/>
+                <a:ea typeface="Pretendard" pitchFamily="34" charset="-122"/>
+                <a:cs typeface="Pretendard" pitchFamily="34" charset="-120"/>
+              </a:rPr>
+              <a:t>영상 나레이션 · 2/2</a:t>
+            </a:r>
+            <a:endParaRPr lang="en-US" sz="950" dirty="0"/>
+          </a:p>
+        </p:txBody>
+      </p:sp>
+      <p:sp>
+        <p:nvSpPr>
+          <p:cNvPr id="14" name="Text 11"/>
+          <p:cNvSpPr txBox="1"/>
+          <p:nvPr/>
+        </p:nvSpPr>
+        <p:spPr>
+          <a:xfrm>
+            <a:off x="6434176" y="2103120"/>
+            <a:ext cx="5007712" cy="566928"/>
+          </a:xfrm>
+          <a:prstGeom prst="rect">
+            <a:avLst/>
+          </a:prstGeom>
+          <a:noFill/>
+          <a:ln/>
+        </p:spPr>
+        <p:txBody>
+          <a:bodyPr wrap="square" lIns="0" tIns="0" rIns="0" bIns="0" rtlCol="0" anchor="t"/>
+          <a:lstStyle/>
+          <a:p>
+            <a:pPr indent="0" marL="0">
+              <a:buNone/>
+            </a:pPr>
+            <a:r>
+              <a:rPr lang="en-US" sz="1400" b="1" dirty="0">
+                <a:solidFill>
+                  <a:srgbClr val="333F48"/>
+                </a:solidFill>
+                <a:latin typeface="Pretendard" pitchFamily="34" charset="0"/>
+                <a:ea typeface="Pretendard" pitchFamily="34" charset="-122"/>
+                <a:cs typeface="Pretendard" pitchFamily="34" charset="-120"/>
+              </a:rPr>
+              <a:t>끝부분</a:t>
+            </a:r>
+            <a:endParaRPr lang="en-US" sz="1400" dirty="0"/>
+          </a:p>
+        </p:txBody>
+      </p:sp>
+      <p:sp>
+        <p:nvSpPr>
+          <p:cNvPr id="15" name="Text 12"/>
+          <p:cNvSpPr txBox="1"/>
+          <p:nvPr/>
+        </p:nvSpPr>
+        <p:spPr>
+          <a:xfrm>
+            <a:off x="6434176" y="2724912"/>
+            <a:ext cx="5007712" cy="2039112"/>
+          </a:xfrm>
+          <a:prstGeom prst="rect">
+            <a:avLst/>
+          </a:prstGeom>
+          <a:noFill/>
+          <a:ln/>
+        </p:spPr>
+        <p:txBody>
+          <a:bodyPr wrap="square" lIns="0" tIns="0" rIns="0" bIns="0" rtlCol="0" anchor="t"/>
+          <a:lstStyle/>
+          <a:p>
+            <a:pPr indent="0" marL="0">
+              <a:lnSpc>
+                <a:spcPct val="125000"/>
+              </a:lnSpc>
+              <a:spcAft>
+                <a:spcPts val="400"/>
+              </a:spcAft>
+              <a:buNone/>
+            </a:pPr>
+            <a:r>
+              <a:rPr lang="en-US" sz="1150" dirty="0">
+                <a:solidFill>
+                  <a:srgbClr val="333F48"/>
+                </a:solidFill>
+                <a:latin typeface="Pretendard" pitchFamily="34" charset="0"/>
+                <a:ea typeface="Pretendard" pitchFamily="34" charset="-122"/>
+                <a:cs typeface="Pretendard" pitchFamily="34" charset="-120"/>
+              </a:rPr>
+              <a:t>그래서 시험을 여러 번 돌리지 않아도, 공정 데이터만 올리면 전체 로트의 결과를 한 번에 확인할 수 있습니다.</a:t>
+            </a:r>
+            <a:endParaRPr lang="en-US" sz="1150" dirty="0"/>
+          </a:p>
+        </p:txBody>
+      </p:sp>
+      <p:sp>
+        <p:nvSpPr>
+          <p:cNvPr id="16" name="Shape 13"/>
+          <p:cNvSpPr/>
+          <p:nvPr/>
+        </p:nvSpPr>
+        <p:spPr>
+          <a:xfrm>
+            <a:off x="548640" y="5138928"/>
+            <a:ext cx="11094415" cy="566928"/>
+          </a:xfrm>
+          <a:prstGeom prst="roundRect">
+            <a:avLst>
+              <a:gd name="adj" fmla="val 12903"/>
+            </a:avLst>
+          </a:prstGeom>
+          <a:solidFill>
+            <a:srgbClr val="333F48"/>
+          </a:solidFill>
+          <a:ln w="12700">
+            <a:solidFill>
+              <a:srgbClr val="333F48"/>
+            </a:solidFill>
+            <a:prstDash val="solid"/>
+          </a:ln>
+        </p:spPr>
+        <p:txBody>
+          <a:bodyPr/>
+          <a:p/>
+        </p:txBody>
+      </p:sp>
+      <p:sp>
+        <p:nvSpPr>
+          <p:cNvPr id="17" name="Text 14"/>
+          <p:cNvSpPr txBox="1"/>
+          <p:nvPr/>
+        </p:nvSpPr>
+        <p:spPr>
+          <a:xfrm>
+            <a:off x="822960" y="5138928"/>
+            <a:ext cx="10545775" cy="566928"/>
+          </a:xfrm>
+          <a:prstGeom prst="rect">
+            <a:avLst/>
+          </a:prstGeom>
+          <a:noFill/>
+          <a:ln/>
+        </p:spPr>
+        <p:txBody>
+          <a:bodyPr wrap="square" lIns="0" tIns="0" rIns="0" bIns="0" rtlCol="0" anchor="ctr"/>
+          <a:lstStyle/>
+          <a:p>
+            <a:pPr indent="0" marL="0">
+              <a:buNone/>
+            </a:pPr>
+            <a:r>
+              <a:rPr lang="en-US" sz="1250" b="1" dirty="0">
+                <a:solidFill>
+                  <a:srgbClr val="FFFFFF"/>
+                </a:solidFill>
+                <a:latin typeface="Pretendard" pitchFamily="34" charset="0"/>
+                <a:ea typeface="Pretendard" pitchFamily="34" charset="-122"/>
+                <a:cs typeface="Pretendard" pitchFamily="34" charset="-120"/>
+              </a:rPr>
+              <a:t>화면 — 300건 학습 → 4,692건 예측 도식 + 시험 전 로트 일괄 예측 화면</a:t>
+            </a:r>
+            <a:endParaRPr lang="en-US" sz="1250" dirty="0"/>
+          </a:p>
+        </p:txBody>
+      </p:sp>
+    </p:spTree>
+  </p:cSld>
+  <p:clrMapOvr>
+    <a:masterClrMapping/>
+  </p:clrMapOvr>
+</p:sld>
+</file>
+
+<file path=ppt/slides/slide11.xml><?xml version="1.0" encoding="utf-8"?>
 <p:sld xmlns:a="http://schemas.openxmlformats.org/drawingml/2006/main" xmlns:r="http://schemas.openxmlformats.org/officeDocument/2006/relationships" xmlns:p="http://schemas.openxmlformats.org/presentationml/2006/main">
   <p:cSld name="Slide 9">
     <p:bg>
@@ -2648,7 +3170,7 @@
                 <a:ea typeface="Pretendard" pitchFamily="34" charset="-122"/>
                 <a:cs typeface="Pretendard" pitchFamily="34" charset="-120"/>
               </a:rPr>
-              <a:t>10 / 13</a:t>
+              <a:t>11 / 15</a:t>
             </a:r>
             <a:endParaRPr lang="en-US" sz="900" dirty="0"/>
           </a:p>
@@ -2964,7 +3486,7 @@
 </p:sld>
 </file>
 
-<file path=ppt/slides/slide11.xml><?xml version="1.0" encoding="utf-8"?>
+<file path=ppt/slides/slide12.xml><?xml version="1.0" encoding="utf-8"?>
 <p:sld xmlns:a="http://schemas.openxmlformats.org/drawingml/2006/main" xmlns:r="http://schemas.openxmlformats.org/officeDocument/2006/relationships" xmlns:p="http://schemas.openxmlformats.org/presentationml/2006/main">
   <p:cSld name="Slide 10">
     <p:bg>
@@ -3123,7 +3645,7 @@
                 <a:ea typeface="Pretendard" pitchFamily="34" charset="-122"/>
                 <a:cs typeface="Pretendard" pitchFamily="34" charset="-120"/>
               </a:rPr>
-              <a:t>11 / 13</a:t>
+              <a:t>12 / 15</a:t>
             </a:r>
             <a:endParaRPr lang="en-US" sz="900" dirty="0"/>
           </a:p>
@@ -3162,7 +3684,7 @@
                 <a:ea typeface="Pretendard" pitchFamily="34" charset="-122"/>
                 <a:cs typeface="Pretendard" pitchFamily="34" charset="-120"/>
               </a:rPr>
-              <a:t>8. 부족한 점과 앞으로의 변화</a:t>
+              <a:t>8. 앞으로의 변화</a:t>
             </a:r>
             <a:endParaRPr lang="en-US" sz="2600" dirty="0"/>
           </a:p>
@@ -3201,7 +3723,7 @@
                 <a:ea typeface="Pretendard" pitchFamily="34" charset="-122"/>
                 <a:cs typeface="Pretendard" pitchFamily="34" charset="-120"/>
               </a:rPr>
-              <a:t>용량 예측은 아직 기준 미달 — 숨기지 않고 공개하고, 현장 데이터로 개선한다</a:t>
+              <a:t>시험 후에 대응하는 품질에서, 만들 때 미리 막는 품질로</a:t>
             </a:r>
             <a:endParaRPr lang="en-US" sz="1400" dirty="0"/>
           </a:p>
@@ -3215,8 +3737,8 @@
         </p:nvSpPr>
         <p:spPr>
           <a:xfrm>
-            <a:off x="548640" y="1664208"/>
-            <a:ext cx="3515258" cy="3246120"/>
+            <a:off x="552450" y="1666875"/>
+            <a:ext cx="5410200" cy="3248025"/>
           </a:xfrm>
           <a:prstGeom prst="roundRect">
             <a:avLst>
@@ -3246,8 +3768,8 @@
         </p:nvSpPr>
         <p:spPr>
           <a:xfrm>
-            <a:off x="749808" y="1847088"/>
-            <a:ext cx="3112922" cy="219456"/>
+            <a:off x="752475" y="1847850"/>
+            <a:ext cx="5010150" cy="219075"/>
           </a:xfrm>
           <a:prstGeom prst="rect">
             <a:avLst/>
@@ -3271,7 +3793,7 @@
                 <a:ea typeface="Pretendard" pitchFamily="34" charset="-122"/>
                 <a:cs typeface="Pretendard" pitchFamily="34" charset="-120"/>
               </a:rPr>
-              <a:t>직접 발표 · 1/3</a:t>
+              <a:t>직접 발표 · 1/2</a:t>
             </a:r>
             <a:endParaRPr lang="en-US" sz="950" dirty="0"/>
           </a:p>
@@ -3285,8 +3807,8 @@
         </p:nvSpPr>
         <p:spPr>
           <a:xfrm>
-            <a:off x="749808" y="2103120"/>
-            <a:ext cx="3112922" cy="566928"/>
+            <a:off x="752475" y="2105025"/>
+            <a:ext cx="5010150" cy="571500"/>
           </a:xfrm>
           <a:prstGeom prst="rect">
             <a:avLst/>
@@ -3310,7 +3832,7 @@
                 <a:ea typeface="Pretendard" pitchFamily="34" charset="-122"/>
                 <a:cs typeface="Pretendard" pitchFamily="34" charset="-120"/>
               </a:rPr>
-              <a:t>부족한 점</a:t>
+              <a:t>앞으로</a:t>
             </a:r>
             <a:endParaRPr lang="en-US" sz="1400" dirty="0"/>
           </a:p>
@@ -3324,8 +3846,8 @@
         </p:nvSpPr>
         <p:spPr>
           <a:xfrm>
-            <a:off x="749808" y="2724912"/>
-            <a:ext cx="3112922" cy="2039112"/>
+            <a:off x="752475" y="2724150"/>
+            <a:ext cx="5010150" cy="2038350"/>
           </a:xfrm>
           <a:prstGeom prst="rect">
             <a:avLst/>
@@ -3355,7 +3877,7 @@
                 <a:ea typeface="Pretendard" pitchFamily="34" charset="-122"/>
                 <a:cs typeface="Pretendard" pitchFamily="34" charset="-120"/>
               </a:rPr>
-              <a:t>부족한 점도 있습니다. 20시간 용량은 86.7%로 기준 90%에 못 미쳤고, 지금은 연습용 가상 데이터라 현장에서 95%가 그대로 나온다고 말씀드릴 수는 없습니다.</a:t>
+              <a:t>앞으로 실제 데이터로 다시 검증하고, 시험 결과가 쌓일 때마다 다시 배우게 하겠습니다.</a:t>
             </a:r>
             <a:endParaRPr lang="en-US" sz="1150" dirty="0"/>
           </a:p>
@@ -3369,8 +3891,8 @@
         </p:nvSpPr>
         <p:spPr>
           <a:xfrm>
-            <a:off x="4338218" y="1664208"/>
-            <a:ext cx="3515258" cy="3246120"/>
+            <a:off x="6229350" y="1666875"/>
+            <a:ext cx="5410200" cy="3248025"/>
           </a:xfrm>
           <a:prstGeom prst="roundRect">
             <a:avLst>
@@ -3400,8 +3922,8 @@
         </p:nvSpPr>
         <p:spPr>
           <a:xfrm>
-            <a:off x="4539386" y="1847088"/>
-            <a:ext cx="3112922" cy="219456"/>
+            <a:off x="6438900" y="1847850"/>
+            <a:ext cx="5010150" cy="219075"/>
           </a:xfrm>
           <a:prstGeom prst="rect">
             <a:avLst/>
@@ -3425,7 +3947,7 @@
                 <a:ea typeface="Pretendard" pitchFamily="34" charset="-122"/>
                 <a:cs typeface="Pretendard" pitchFamily="34" charset="-120"/>
               </a:rPr>
-              <a:t>직접 발표 · 2/3</a:t>
+              <a:t>직접 발표 · 2/2</a:t>
             </a:r>
             <a:endParaRPr lang="en-US" sz="950" dirty="0"/>
           </a:p>
@@ -3439,8 +3961,8 @@
         </p:nvSpPr>
         <p:spPr>
           <a:xfrm>
-            <a:off x="4539386" y="2103120"/>
-            <a:ext cx="3112922" cy="566928"/>
+            <a:off x="6438900" y="2105025"/>
+            <a:ext cx="5010150" cy="571500"/>
           </a:xfrm>
           <a:prstGeom prst="rect">
             <a:avLst/>
@@ -3464,7 +3986,7 @@
                 <a:ea typeface="Pretendard" pitchFamily="34" charset="-122"/>
                 <a:cs typeface="Pretendard" pitchFamily="34" charset="-120"/>
               </a:rPr>
-              <a:t>앞으로</a:t>
+              <a:t>마무리</a:t>
             </a:r>
             <a:endParaRPr lang="en-US" sz="1400" dirty="0"/>
           </a:p>
@@ -3478,162 +4000,8 @@
         </p:nvSpPr>
         <p:spPr>
           <a:xfrm>
-            <a:off x="4539386" y="2724912"/>
-            <a:ext cx="3112922" cy="2039112"/>
-          </a:xfrm>
-          <a:prstGeom prst="rect">
-            <a:avLst/>
-          </a:prstGeom>
-          <a:noFill/>
-          <a:ln/>
-        </p:spPr>
-        <p:txBody>
-          <a:bodyPr wrap="square" lIns="0" tIns="0" rIns="0" bIns="0" rtlCol="0" anchor="t"/>
-          <a:lstStyle/>
-          <a:p>
-            <a:pPr indent="0" marL="0">
-              <a:lnSpc>
-                <a:spcPct val="125000"/>
-              </a:lnSpc>
-              <a:spcAft>
-                <a:spcPts val="400"/>
-              </a:spcAft>
-              <a:buNone/>
-            </a:pPr>
-            <a:r>
-              <a:rPr lang="en-US" sz="1150" dirty="0">
-                <a:solidFill>
-                  <a:srgbClr val="333F48"/>
-                </a:solidFill>
-                <a:latin typeface="Pretendard" pitchFamily="34" charset="0"/>
-                <a:ea typeface="Pretendard" pitchFamily="34" charset="-122"/>
-                <a:cs typeface="Pretendard" pitchFamily="34" charset="-120"/>
-              </a:rPr>
-              <a:t>앞으로 실제 데이터로 다시 검증하고, 시험 결과가 쌓일 때마다 다시 배우게 하겠습니다.</a:t>
-            </a:r>
-            <a:endParaRPr lang="en-US" sz="1150" dirty="0"/>
-          </a:p>
-        </p:txBody>
-      </p:sp>
-      <p:sp>
-        <p:nvSpPr>
-          <p:cNvPr id="16" name="Shape 13"/>
-          <p:cNvSpPr/>
-          <p:nvPr/>
-        </p:nvSpPr>
-        <p:spPr>
-          <a:xfrm>
-            <a:off x="8127797" y="1664208"/>
-            <a:ext cx="3515258" cy="3246120"/>
-          </a:xfrm>
-          <a:prstGeom prst="roundRect">
-            <a:avLst>
-              <a:gd name="adj" fmla="val 2254"/>
-            </a:avLst>
-          </a:prstGeom>
-          <a:solidFill>
-            <a:srgbClr val="FFFFFF"/>
-          </a:solidFill>
-          <a:ln w="9525">
-            <a:solidFill>
-              <a:srgbClr val="D0D0CE"/>
-            </a:solidFill>
-            <a:prstDash val="solid"/>
-          </a:ln>
-        </p:spPr>
-        <p:txBody>
-          <a:bodyPr/>
-          <a:p/>
-        </p:txBody>
-      </p:sp>
-      <p:sp>
-        <p:nvSpPr>
-          <p:cNvPr id="17" name="Text 14"/>
-          <p:cNvSpPr txBox="1"/>
-          <p:nvPr/>
-        </p:nvSpPr>
-        <p:spPr>
-          <a:xfrm>
-            <a:off x="8328965" y="1847088"/>
-            <a:ext cx="3112922" cy="219456"/>
-          </a:xfrm>
-          <a:prstGeom prst="rect">
-            <a:avLst/>
-          </a:prstGeom>
-          <a:noFill/>
-          <a:ln/>
-        </p:spPr>
-        <p:txBody>
-          <a:bodyPr wrap="square" lIns="0" tIns="0" rIns="0" bIns="0" rtlCol="0" anchor="t"/>
-          <a:lstStyle/>
-          <a:p>
-            <a:pPr indent="0" marL="0">
-              <a:buNone/>
-            </a:pPr>
-            <a:r>
-              <a:rPr lang="en-US" sz="950" b="1" dirty="0">
-                <a:solidFill>
-                  <a:srgbClr val="006A76"/>
-                </a:solidFill>
-                <a:latin typeface="Pretendard" pitchFamily="34" charset="0"/>
-                <a:ea typeface="Pretendard" pitchFamily="34" charset="-122"/>
-                <a:cs typeface="Pretendard" pitchFamily="34" charset="-120"/>
-              </a:rPr>
-              <a:t>직접 발표 · 3/3</a:t>
-            </a:r>
-            <a:endParaRPr lang="en-US" sz="950" dirty="0"/>
-          </a:p>
-        </p:txBody>
-      </p:sp>
-      <p:sp>
-        <p:nvSpPr>
-          <p:cNvPr id="18" name="Text 15"/>
-          <p:cNvSpPr txBox="1"/>
-          <p:nvPr/>
-        </p:nvSpPr>
-        <p:spPr>
-          <a:xfrm>
-            <a:off x="8328965" y="2103120"/>
-            <a:ext cx="3112922" cy="566928"/>
-          </a:xfrm>
-          <a:prstGeom prst="rect">
-            <a:avLst/>
-          </a:prstGeom>
-          <a:noFill/>
-          <a:ln/>
-        </p:spPr>
-        <p:txBody>
-          <a:bodyPr wrap="square" lIns="0" tIns="0" rIns="0" bIns="0" rtlCol="0" anchor="t"/>
-          <a:lstStyle/>
-          <a:p>
-            <a:pPr indent="0" marL="0">
-              <a:buNone/>
-            </a:pPr>
-            <a:r>
-              <a:rPr lang="en-US" sz="1400" b="1" dirty="0">
-                <a:solidFill>
-                  <a:srgbClr val="333F48"/>
-                </a:solidFill>
-                <a:latin typeface="Pretendard" pitchFamily="34" charset="0"/>
-                <a:ea typeface="Pretendard" pitchFamily="34" charset="-122"/>
-                <a:cs typeface="Pretendard" pitchFamily="34" charset="-120"/>
-              </a:rPr>
-              <a:t>마무리</a:t>
-            </a:r>
-            <a:endParaRPr lang="en-US" sz="1400" dirty="0"/>
-          </a:p>
-        </p:txBody>
-      </p:sp>
-      <p:sp>
-        <p:nvSpPr>
-          <p:cNvPr id="19" name="Text 16"/>
-          <p:cNvSpPr txBox="1"/>
-          <p:nvPr/>
-        </p:nvSpPr>
-        <p:spPr>
-          <a:xfrm>
-            <a:off x="8328965" y="2724912"/>
-            <a:ext cx="3112922" cy="2039112"/>
+            <a:off x="6438900" y="2724150"/>
+            <a:ext cx="5010150" cy="2038350"/>
           </a:xfrm>
           <a:prstGeom prst="rect">
             <a:avLst/>
@@ -3733,7 +4101,7 @@
                 <a:ea typeface="Pretendard" pitchFamily="34" charset="-122"/>
                 <a:cs typeface="Pretendard" pitchFamily="34" charset="-120"/>
               </a:rPr>
-              <a:t>화면 — 항목별 일치율 표(용량 86.7% 강조) → 마무리 카드</a:t>
+              <a:t>화면 — 마무리 카드</a:t>
             </a:r>
             <a:endParaRPr lang="en-US" sz="1250" dirty="0"/>
           </a:p>
@@ -3747,7 +4115,7 @@
 </p:sld>
 </file>
 
-<file path=ppt/slides/slide12.xml><?xml version="1.0" encoding="utf-8"?>
+<file path=ppt/slides/slide13.xml><?xml version="1.0" encoding="utf-8"?>
 <p:sld xmlns:a="http://schemas.openxmlformats.org/drawingml/2006/main" xmlns:r="http://schemas.openxmlformats.org/officeDocument/2006/relationships" xmlns:p="http://schemas.openxmlformats.org/presentationml/2006/main">
   <p:cSld name="Slide 12">
     <p:bg>
@@ -3906,7 +4274,7 @@
                 <a:ea typeface="Pretendard" pitchFamily="34" charset="-122"/>
                 <a:cs typeface="Pretendard" pitchFamily="34" charset="-120"/>
               </a:rPr>
-              <a:t>12 / 13</a:t>
+              <a:t>13 / 15</a:t>
             </a:r>
             <a:endParaRPr lang="en-US" sz="900" dirty="0"/>
           </a:p>
@@ -5905,7 +6273,7 @@
 </p:sld>
 </file>
 
-<file path=ppt/slides/slide13.xml><?xml version="1.0" encoding="utf-8"?>
+<file path=ppt/slides/slide14.xml><?xml version="1.0" encoding="utf-8"?>
 <p:sld xmlns:a="http://schemas.openxmlformats.org/drawingml/2006/main" xmlns:r="http://schemas.openxmlformats.org/officeDocument/2006/relationships" xmlns:p="http://schemas.openxmlformats.org/presentationml/2006/main">
   <p:cSld name="Slide 13">
     <p:bg>
@@ -6064,7 +6432,7 @@
                 <a:ea typeface="Pretendard" pitchFamily="34" charset="-122"/>
                 <a:cs typeface="Pretendard" pitchFamily="34" charset="-120"/>
               </a:rPr>
-              <a:t>13 / 13</a:t>
+              <a:t>14 / 15</a:t>
             </a:r>
             <a:endParaRPr lang="en-US" sz="900" dirty="0"/>
           </a:p>
@@ -6103,7 +6471,7 @@
                 <a:ea typeface="Pretendard" pitchFamily="34" charset="-122"/>
                 <a:cs typeface="Pretendard" pitchFamily="34" charset="-120"/>
               </a:rPr>
-              <a:t>예상 질문과 답변</a:t>
+              <a:t>예상 질문과 답변 1/2</a:t>
             </a:r>
             <a:endParaRPr lang="en-US" sz="2600" dirty="0"/>
           </a:p>
@@ -6142,7 +6510,7 @@
                 <a:ea typeface="Pretendard" pitchFamily="34" charset="-122"/>
                 <a:cs typeface="Pretendard" pitchFamily="34" charset="-120"/>
               </a:rPr>
-              <a:t>묻기 전에 한계를 먼저 밝히면 신뢰가 올라간다</a:t>
+              <a:t>물어보면 한계까지 솔직하게 답한다</a:t>
             </a:r>
             <a:endParaRPr lang="en-US" sz="1400" dirty="0"/>
           </a:p>
@@ -6605,6 +6973,782 @@
                 <a:cs typeface="Pretendard" pitchFamily="34" charset="-120"/>
               </a:rPr>
               <a:t>지금은 연습용 가상 데이터입니다. 실제 현장 데이터를 쌓아 같은 방식으로 다시 검증하겠습니다.</a:t>
+            </a:r>
+            <a:endParaRPr lang="en-US" sz="1150" dirty="0"/>
+          </a:p>
+        </p:txBody>
+      </p:sp>
+      <p:sp>
+        <p:nvSpPr>
+          <p:cNvPr id="20" name="Shape 17"/>
+          <p:cNvSpPr/>
+          <p:nvPr/>
+        </p:nvSpPr>
+        <p:spPr>
+          <a:xfrm>
+            <a:off x="548640" y="5138928"/>
+            <a:ext cx="11094415" cy="566928"/>
+          </a:xfrm>
+          <a:prstGeom prst="roundRect">
+            <a:avLst>
+              <a:gd name="adj" fmla="val 12903"/>
+            </a:avLst>
+          </a:prstGeom>
+          <a:solidFill>
+            <a:srgbClr val="333F48"/>
+          </a:solidFill>
+          <a:ln w="12700">
+            <a:solidFill>
+              <a:srgbClr val="333F48"/>
+            </a:solidFill>
+            <a:prstDash val="solid"/>
+          </a:ln>
+        </p:spPr>
+        <p:txBody>
+          <a:bodyPr/>
+          <a:p/>
+        </p:txBody>
+      </p:sp>
+      <p:sp>
+        <p:nvSpPr>
+          <p:cNvPr id="21" name="Text 18"/>
+          <p:cNvSpPr txBox="1"/>
+          <p:nvPr/>
+        </p:nvSpPr>
+        <p:spPr>
+          <a:xfrm>
+            <a:off x="822960" y="5138928"/>
+            <a:ext cx="10545775" cy="566928"/>
+          </a:xfrm>
+          <a:prstGeom prst="rect">
+            <a:avLst/>
+          </a:prstGeom>
+          <a:noFill/>
+          <a:ln/>
+        </p:spPr>
+        <p:txBody>
+          <a:bodyPr wrap="square" lIns="0" tIns="0" rIns="0" bIns="0" rtlCol="0" anchor="ctr"/>
+          <a:lstStyle/>
+          <a:p>
+            <a:pPr indent="0" marL="0">
+              <a:buNone/>
+            </a:pPr>
+            <a:r>
+              <a:rPr lang="en-US" sz="1250" b="1" dirty="0">
+                <a:solidFill>
+                  <a:srgbClr val="FFFFFF"/>
+                </a:solidFill>
+                <a:latin typeface="Pretendard" pitchFamily="34" charset="0"/>
+                <a:ea typeface="Pretendard" pitchFamily="34" charset="-122"/>
+                <a:cs typeface="Pretendard" pitchFamily="34" charset="-120"/>
+              </a:rPr>
+              <a:t>모르는 것은 '아직 확인하지 못했다'고 답한다</a:t>
+            </a:r>
+            <a:endParaRPr lang="en-US" sz="1250" dirty="0"/>
+          </a:p>
+        </p:txBody>
+      </p:sp>
+    </p:spTree>
+  </p:cSld>
+  <p:clrMapOvr>
+    <a:masterClrMapping/>
+  </p:clrMapOvr>
+</p:sld>
+</file>
+
+<file path=ppt/slides/slide15.xml><?xml version="1.0" encoding="utf-8"?>
+<p:sld xmlns:a="http://schemas.openxmlformats.org/drawingml/2006/main" xmlns:p="http://schemas.openxmlformats.org/presentationml/2006/main" xmlns:r="http://schemas.openxmlformats.org/officeDocument/2006/relationships">
+  <p:cSld>
+    <p:bg>
+      <p:bgPr>
+        <a:solidFill>
+          <a:srgbClr val="FFFFFF"/>
+        </a:solidFill>
+      </p:bgPr>
+    </p:bg>
+    <p:spTree>
+      <p:nvGrpSpPr>
+        <p:cNvPr id="1" name=""/>
+        <p:cNvGrpSpPr/>
+        <p:nvPr/>
+      </p:nvGrpSpPr>
+      <p:grpSpPr/>
+      <p:pic>
+        <p:nvPicPr>
+          <p:cNvPr id="2" name="Image 0" descr="/Users/junny_macbook/.claude/skills/sebang-deck/assets/sebang_wordmark_dark.png">    </p:cNvPr>
+          <p:cNvPicPr>
+            <a:picLocks noChangeAspect="1"/>
+          </p:cNvPicPr>
+          <p:nvPr/>
+        </p:nvPicPr>
+        <p:blipFill>
+          <a:blip r:embed="rId2"/>
+          <a:stretch>
+            <a:fillRect/>
+          </a:stretch>
+        </p:blipFill>
+        <p:spPr>
+          <a:xfrm>
+            <a:off x="548640" y="292608"/>
+            <a:ext cx="868680" cy="185801"/>
+          </a:xfrm>
+          <a:prstGeom prst="rect">
+            <a:avLst/>
+          </a:prstGeom>
+        </p:spPr>
+      </p:pic>
+      <p:sp>
+        <p:nvSpPr>
+          <p:cNvPr id="3" name="Text 0"/>
+          <p:cNvSpPr txBox="1"/>
+          <p:nvPr/>
+        </p:nvSpPr>
+        <p:spPr>
+          <a:xfrm>
+            <a:off x="1572768" y="256032"/>
+            <a:ext cx="5486400" cy="274320"/>
+          </a:xfrm>
+          <a:prstGeom prst="rect">
+            <a:avLst/>
+          </a:prstGeom>
+          <a:noFill/>
+          <a:ln/>
+        </p:spPr>
+        <p:txBody>
+          <a:bodyPr wrap="square" lIns="0" tIns="0" rIns="0" bIns="0" rtlCol="0" anchor="ctr"/>
+          <a:lstStyle/>
+          <a:p>
+            <a:pPr indent="0" marL="0">
+              <a:buNone/>
+            </a:pPr>
+            <a:r>
+              <a:rPr lang="en-US" sz="950" dirty="0">
+                <a:solidFill>
+                  <a:srgbClr val="717779"/>
+                </a:solidFill>
+                <a:latin typeface="Pretendard" pitchFamily="34" charset="0"/>
+                <a:ea typeface="Pretendard" pitchFamily="34" charset="-122"/>
+                <a:cs typeface="Pretendard" pitchFamily="34" charset="-120"/>
+              </a:rPr>
+              <a:t>창원품질경영팀 · 임원 보고</a:t>
+            </a:r>
+            <a:endParaRPr lang="en-US" sz="950" dirty="0"/>
+          </a:p>
+        </p:txBody>
+      </p:sp>
+      <p:sp>
+        <p:nvSpPr>
+          <p:cNvPr id="4" name="Text 1"/>
+          <p:cNvSpPr txBox="1"/>
+          <p:nvPr/>
+        </p:nvSpPr>
+        <p:spPr>
+          <a:xfrm>
+            <a:off x="548640" y="6400800"/>
+            <a:ext cx="7315200" cy="228600"/>
+          </a:xfrm>
+          <a:prstGeom prst="rect">
+            <a:avLst/>
+          </a:prstGeom>
+          <a:noFill/>
+          <a:ln/>
+        </p:spPr>
+        <p:txBody>
+          <a:bodyPr wrap="square" lIns="0" tIns="0" rIns="0" bIns="0" rtlCol="0" anchor="ctr"/>
+          <a:lstStyle/>
+          <a:p>
+            <a:pPr indent="0" marL="0">
+              <a:buNone/>
+            </a:pPr>
+            <a:r>
+              <a:rPr lang="en-US" sz="900" dirty="0">
+                <a:solidFill>
+                  <a:srgbClr val="717779"/>
+                </a:solidFill>
+                <a:latin typeface="Pretendard" pitchFamily="34" charset="0"/>
+                <a:ea typeface="Pretendard" pitchFamily="34" charset="-122"/>
+                <a:cs typeface="Pretendard" pitchFamily="34" charset="-120"/>
+              </a:rPr>
+              <a:t>창원품질경영팀 김경준 주임  ·  AI 포화도 예측  ·  발표 대본</a:t>
+            </a:r>
+            <a:endParaRPr lang="en-US" sz="900" dirty="0"/>
+          </a:p>
+        </p:txBody>
+      </p:sp>
+      <p:sp>
+        <p:nvSpPr>
+          <p:cNvPr id="5" name="Text 2"/>
+          <p:cNvSpPr txBox="1"/>
+          <p:nvPr/>
+        </p:nvSpPr>
+        <p:spPr>
+          <a:xfrm>
+            <a:off x="10545775" y="6400800"/>
+            <a:ext cx="1097280" cy="228600"/>
+          </a:xfrm>
+          <a:prstGeom prst="rect">
+            <a:avLst/>
+          </a:prstGeom>
+          <a:noFill/>
+          <a:ln/>
+        </p:spPr>
+        <p:txBody>
+          <a:bodyPr wrap="square" lIns="0" tIns="0" rIns="0" bIns="0" rtlCol="0" anchor="ctr"/>
+          <a:lstStyle/>
+          <a:p>
+            <a:pPr algn="r" indent="0" marL="0">
+              <a:buNone/>
+            </a:pPr>
+            <a:r>
+              <a:rPr lang="en-US" sz="900" dirty="0">
+                <a:solidFill>
+                  <a:srgbClr val="717779"/>
+                </a:solidFill>
+                <a:latin typeface="Pretendard" pitchFamily="34" charset="0"/>
+                <a:ea typeface="Pretendard" pitchFamily="34" charset="-122"/>
+                <a:cs typeface="Pretendard" pitchFamily="34" charset="-120"/>
+              </a:rPr>
+              <a:t>15 / 15</a:t>
+            </a:r>
+            <a:endParaRPr lang="en-US" sz="900" dirty="0"/>
+          </a:p>
+        </p:txBody>
+      </p:sp>
+      <p:sp>
+        <p:nvSpPr>
+          <p:cNvPr id="6" name="Text 3"/>
+          <p:cNvSpPr txBox="1"/>
+          <p:nvPr/>
+        </p:nvSpPr>
+        <p:spPr>
+          <a:xfrm>
+            <a:off x="548640" y="658368"/>
+            <a:ext cx="11094415" cy="493776"/>
+          </a:xfrm>
+          <a:prstGeom prst="rect">
+            <a:avLst/>
+          </a:prstGeom>
+          <a:noFill/>
+          <a:ln/>
+        </p:spPr>
+        <p:txBody>
+          <a:bodyPr wrap="square" lIns="0" tIns="0" rIns="0" bIns="0" rtlCol="0" anchor="ctr"/>
+          <a:lstStyle/>
+          <a:p>
+            <a:pPr indent="0" marL="0">
+              <a:buNone/>
+            </a:pPr>
+            <a:r>
+              <a:rPr lang="en-US" sz="2600" b="1" dirty="0">
+                <a:solidFill>
+                  <a:srgbClr val="333F48"/>
+                </a:solidFill>
+                <a:latin typeface="Pretendard" pitchFamily="34" charset="0"/>
+                <a:ea typeface="Pretendard" pitchFamily="34" charset="-122"/>
+                <a:cs typeface="Pretendard" pitchFamily="34" charset="-120"/>
+              </a:rPr>
+              <a:t>예상 질문과 답변 2/2 — 부족한 점</a:t>
+            </a:r>
+            <a:endParaRPr lang="en-US" sz="2600" dirty="0"/>
+          </a:p>
+        </p:txBody>
+      </p:sp>
+      <p:sp>
+        <p:nvSpPr>
+          <p:cNvPr id="7" name="Text 4"/>
+          <p:cNvSpPr txBox="1"/>
+          <p:nvPr/>
+        </p:nvSpPr>
+        <p:spPr>
+          <a:xfrm>
+            <a:off x="548640" y="1152144"/>
+            <a:ext cx="11094415" cy="329184"/>
+          </a:xfrm>
+          <a:prstGeom prst="rect">
+            <a:avLst/>
+          </a:prstGeom>
+          <a:noFill/>
+          <a:ln/>
+        </p:spPr>
+        <p:txBody>
+          <a:bodyPr wrap="square" lIns="0" tIns="0" rIns="0" bIns="0" rtlCol="0" anchor="ctr"/>
+          <a:lstStyle/>
+          <a:p>
+            <a:pPr indent="0" marL="0">
+              <a:buNone/>
+            </a:pPr>
+            <a:r>
+              <a:rPr lang="en-US" sz="1400" b="1" dirty="0">
+                <a:solidFill>
+                  <a:srgbClr val="006A76"/>
+                </a:solidFill>
+                <a:latin typeface="Pretendard" pitchFamily="34" charset="0"/>
+                <a:ea typeface="Pretendard" pitchFamily="34" charset="-122"/>
+                <a:cs typeface="Pretendard" pitchFamily="34" charset="-120"/>
+              </a:rPr>
+              <a:t>발표에서는 앞세우지 않고, 질문이 나오면 숫자로 정확히 답한다</a:t>
+            </a:r>
+            <a:endParaRPr lang="en-US" sz="1400" dirty="0"/>
+          </a:p>
+        </p:txBody>
+      </p:sp>
+      <p:sp>
+        <p:nvSpPr>
+          <p:cNvPr id="8" name="Shape 5"/>
+          <p:cNvSpPr/>
+          <p:nvPr/>
+        </p:nvSpPr>
+        <p:spPr>
+          <a:xfrm>
+            <a:off x="548640" y="1664208"/>
+            <a:ext cx="3515258" cy="3246120"/>
+          </a:xfrm>
+          <a:prstGeom prst="roundRect">
+            <a:avLst>
+              <a:gd name="adj" fmla="val 2254"/>
+            </a:avLst>
+          </a:prstGeom>
+          <a:solidFill>
+            <a:srgbClr val="FFFFFF"/>
+          </a:solidFill>
+          <a:ln w="9525">
+            <a:solidFill>
+              <a:srgbClr val="D0D0CE"/>
+            </a:solidFill>
+            <a:prstDash val="solid"/>
+          </a:ln>
+        </p:spPr>
+        <p:txBody>
+          <a:bodyPr/>
+          <a:p/>
+        </p:txBody>
+      </p:sp>
+      <p:sp>
+        <p:nvSpPr>
+          <p:cNvPr id="9" name="Text 6"/>
+          <p:cNvSpPr txBox="1"/>
+          <p:nvPr/>
+        </p:nvSpPr>
+        <p:spPr>
+          <a:xfrm>
+            <a:off x="749808" y="1847088"/>
+            <a:ext cx="3112922" cy="219456"/>
+          </a:xfrm>
+          <a:prstGeom prst="rect">
+            <a:avLst/>
+          </a:prstGeom>
+          <a:noFill/>
+          <a:ln/>
+        </p:spPr>
+        <p:txBody>
+          <a:bodyPr wrap="square" lIns="0" tIns="0" rIns="0" bIns="0" rtlCol="0" anchor="t"/>
+          <a:lstStyle/>
+          <a:p>
+            <a:pPr indent="0" marL="0">
+              <a:buNone/>
+            </a:pPr>
+            <a:r>
+              <a:rPr lang="en-US" sz="950" b="1" dirty="0">
+                <a:solidFill>
+                  <a:srgbClr val="006A76"/>
+                </a:solidFill>
+                <a:latin typeface="Pretendard" pitchFamily="34" charset="0"/>
+                <a:ea typeface="Pretendard" pitchFamily="34" charset="-122"/>
+                <a:cs typeface="Pretendard" pitchFamily="34" charset="-120"/>
+              </a:rPr>
+              <a:t>Q4</a:t>
+            </a:r>
+            <a:endParaRPr lang="en-US" sz="950" dirty="0"/>
+          </a:p>
+        </p:txBody>
+      </p:sp>
+      <p:sp>
+        <p:nvSpPr>
+          <p:cNvPr id="10" name="Text 7"/>
+          <p:cNvSpPr txBox="1"/>
+          <p:nvPr/>
+        </p:nvSpPr>
+        <p:spPr>
+          <a:xfrm>
+            <a:off x="749808" y="2103120"/>
+            <a:ext cx="3112922" cy="566928"/>
+          </a:xfrm>
+          <a:prstGeom prst="rect">
+            <a:avLst/>
+          </a:prstGeom>
+          <a:noFill/>
+          <a:ln/>
+        </p:spPr>
+        <p:txBody>
+          <a:bodyPr wrap="square" lIns="0" tIns="0" rIns="0" bIns="0" rtlCol="0" anchor="t"/>
+          <a:lstStyle/>
+          <a:p>
+            <a:pPr indent="0" marL="0">
+              <a:buNone/>
+            </a:pPr>
+            <a:r>
+              <a:rPr lang="en-US" sz="1400" b="1" dirty="0">
+                <a:solidFill>
+                  <a:srgbClr val="333F48"/>
+                </a:solidFill>
+                <a:latin typeface="Pretendard" pitchFamily="34" charset="0"/>
+                <a:ea typeface="Pretendard" pitchFamily="34" charset="-122"/>
+                <a:cs typeface="Pretendard" pitchFamily="34" charset="-120"/>
+              </a:rPr>
+              <a:t>부족한 점은 무엇인가요?</a:t>
+            </a:r>
+            <a:endParaRPr lang="en-US" sz="1400" dirty="0"/>
+          </a:p>
+        </p:txBody>
+      </p:sp>
+      <p:sp>
+        <p:nvSpPr>
+          <p:cNvPr id="11" name="Text 8"/>
+          <p:cNvSpPr txBox="1"/>
+          <p:nvPr/>
+        </p:nvSpPr>
+        <p:spPr>
+          <a:xfrm>
+            <a:off x="749808" y="2724912"/>
+            <a:ext cx="3112922" cy="2039112"/>
+          </a:xfrm>
+          <a:prstGeom prst="rect">
+            <a:avLst/>
+          </a:prstGeom>
+          <a:noFill/>
+          <a:ln/>
+        </p:spPr>
+        <p:txBody>
+          <a:bodyPr wrap="square" lIns="0" tIns="0" rIns="0" bIns="0" rtlCol="0" anchor="t"/>
+          <a:lstStyle/>
+          <a:p>
+            <a:pPr indent="0" marL="0">
+              <a:lnSpc>
+                <a:spcPct val="125000"/>
+              </a:lnSpc>
+              <a:spcAft>
+                <a:spcPts val="400"/>
+              </a:spcAft>
+              <a:buNone/>
+            </a:pPr>
+            <a:r>
+              <a:rPr lang="en-US" sz="1150" dirty="0">
+                <a:solidFill>
+                  <a:srgbClr val="333F48"/>
+                </a:solidFill>
+                <a:latin typeface="Pretendard" pitchFamily="34" charset="0"/>
+                <a:ea typeface="Pretendard" pitchFamily="34" charset="-122"/>
+                <a:cs typeface="Pretendard" pitchFamily="34" charset="-120"/>
+              </a:rPr>
+              <a:t>20시간 용량의 일치율이 86.7%(52/60)로 신뢰 기준 90%에 못 미쳤습니다. 포화도 95%, 저온 시동 성능 90%·93%는 기준을 넘었습니다.</a:t>
+            </a:r>
+            <a:endParaRPr lang="en-US" sz="1150" dirty="0"/>
+          </a:p>
+        </p:txBody>
+      </p:sp>
+      <p:sp>
+        <p:nvSpPr>
+          <p:cNvPr id="12" name="Shape 9"/>
+          <p:cNvSpPr/>
+          <p:nvPr/>
+        </p:nvSpPr>
+        <p:spPr>
+          <a:xfrm>
+            <a:off x="4338218" y="1664208"/>
+            <a:ext cx="3515258" cy="3246120"/>
+          </a:xfrm>
+          <a:prstGeom prst="roundRect">
+            <a:avLst>
+              <a:gd name="adj" fmla="val 2254"/>
+            </a:avLst>
+          </a:prstGeom>
+          <a:solidFill>
+            <a:srgbClr val="FFFFFF"/>
+          </a:solidFill>
+          <a:ln w="9525">
+            <a:solidFill>
+              <a:srgbClr val="D0D0CE"/>
+            </a:solidFill>
+            <a:prstDash val="solid"/>
+          </a:ln>
+        </p:spPr>
+        <p:txBody>
+          <a:bodyPr/>
+          <a:p/>
+        </p:txBody>
+      </p:sp>
+      <p:sp>
+        <p:nvSpPr>
+          <p:cNvPr id="13" name="Text 10"/>
+          <p:cNvSpPr txBox="1"/>
+          <p:nvPr/>
+        </p:nvSpPr>
+        <p:spPr>
+          <a:xfrm>
+            <a:off x="4539386" y="1847088"/>
+            <a:ext cx="3112922" cy="219456"/>
+          </a:xfrm>
+          <a:prstGeom prst="rect">
+            <a:avLst/>
+          </a:prstGeom>
+          <a:noFill/>
+          <a:ln/>
+        </p:spPr>
+        <p:txBody>
+          <a:bodyPr wrap="square" lIns="0" tIns="0" rIns="0" bIns="0" rtlCol="0" anchor="t"/>
+          <a:lstStyle/>
+          <a:p>
+            <a:pPr indent="0" marL="0">
+              <a:buNone/>
+            </a:pPr>
+            <a:r>
+              <a:rPr lang="en-US" sz="950" b="1" dirty="0">
+                <a:solidFill>
+                  <a:srgbClr val="006A76"/>
+                </a:solidFill>
+                <a:latin typeface="Pretendard" pitchFamily="34" charset="0"/>
+                <a:ea typeface="Pretendard" pitchFamily="34" charset="-122"/>
+                <a:cs typeface="Pretendard" pitchFamily="34" charset="-120"/>
+              </a:rPr>
+              <a:t>Q5</a:t>
+            </a:r>
+            <a:endParaRPr lang="en-US" sz="950" dirty="0"/>
+          </a:p>
+        </p:txBody>
+      </p:sp>
+      <p:sp>
+        <p:nvSpPr>
+          <p:cNvPr id="14" name="Text 11"/>
+          <p:cNvSpPr txBox="1"/>
+          <p:nvPr/>
+        </p:nvSpPr>
+        <p:spPr>
+          <a:xfrm>
+            <a:off x="4539386" y="2103120"/>
+            <a:ext cx="3112922" cy="566928"/>
+          </a:xfrm>
+          <a:prstGeom prst="rect">
+            <a:avLst/>
+          </a:prstGeom>
+          <a:noFill/>
+          <a:ln/>
+        </p:spPr>
+        <p:txBody>
+          <a:bodyPr wrap="square" lIns="0" tIns="0" rIns="0" bIns="0" rtlCol="0" anchor="t"/>
+          <a:lstStyle/>
+          <a:p>
+            <a:pPr indent="0" marL="0">
+              <a:buNone/>
+            </a:pPr>
+            <a:r>
+              <a:rPr lang="en-US" sz="1400" b="1" dirty="0">
+                <a:solidFill>
+                  <a:srgbClr val="333F48"/>
+                </a:solidFill>
+                <a:latin typeface="Pretendard" pitchFamily="34" charset="0"/>
+                <a:ea typeface="Pretendard" pitchFamily="34" charset="-122"/>
+                <a:cs typeface="Pretendard" pitchFamily="34" charset="-120"/>
+              </a:rPr>
+              <a:t>이 수치를 믿어도 되나요?</a:t>
+            </a:r>
+            <a:endParaRPr lang="en-US" sz="1400" dirty="0"/>
+          </a:p>
+        </p:txBody>
+      </p:sp>
+      <p:sp>
+        <p:nvSpPr>
+          <p:cNvPr id="15" name="Text 12"/>
+          <p:cNvSpPr txBox="1"/>
+          <p:nvPr/>
+        </p:nvSpPr>
+        <p:spPr>
+          <a:xfrm>
+            <a:off x="4539386" y="2724912"/>
+            <a:ext cx="3112922" cy="2039112"/>
+          </a:xfrm>
+          <a:prstGeom prst="rect">
+            <a:avLst/>
+          </a:prstGeom>
+          <a:noFill/>
+          <a:ln/>
+        </p:spPr>
+        <p:txBody>
+          <a:bodyPr wrap="square" lIns="0" tIns="0" rIns="0" bIns="0" rtlCol="0" anchor="t"/>
+          <a:lstStyle/>
+          <a:p>
+            <a:pPr indent="0" marL="0">
+              <a:lnSpc>
+                <a:spcPct val="125000"/>
+              </a:lnSpc>
+              <a:spcAft>
+                <a:spcPts val="400"/>
+              </a:spcAft>
+              <a:buNone/>
+            </a:pPr>
+            <a:r>
+              <a:rPr lang="en-US" sz="1150" dirty="0">
+                <a:solidFill>
+                  <a:srgbClr val="333F48"/>
+                </a:solidFill>
+                <a:latin typeface="Pretendard" pitchFamily="34" charset="0"/>
+                <a:ea typeface="Pretendard" pitchFamily="34" charset="-122"/>
+                <a:cs typeface="Pretendard" pitchFamily="34" charset="-120"/>
+              </a:rPr>
+              <a:t>연습용 가상 데이터이고 채점에 쓴 표본이 60건이라, 현장에서 같은 수치가 나온다고 단정할 수 없습니다. 실제 데이터로 같은 방식으로 다시 검증하겠습니다.</a:t>
+            </a:r>
+            <a:endParaRPr lang="en-US" sz="1150" dirty="0"/>
+          </a:p>
+        </p:txBody>
+      </p:sp>
+      <p:sp>
+        <p:nvSpPr>
+          <p:cNvPr id="16" name="Shape 13"/>
+          <p:cNvSpPr/>
+          <p:nvPr/>
+        </p:nvSpPr>
+        <p:spPr>
+          <a:xfrm>
+            <a:off x="8127797" y="1664208"/>
+            <a:ext cx="3515258" cy="3246120"/>
+          </a:xfrm>
+          <a:prstGeom prst="roundRect">
+            <a:avLst>
+              <a:gd name="adj" fmla="val 2254"/>
+            </a:avLst>
+          </a:prstGeom>
+          <a:solidFill>
+            <a:srgbClr val="FFFFFF"/>
+          </a:solidFill>
+          <a:ln w="9525">
+            <a:solidFill>
+              <a:srgbClr val="D0D0CE"/>
+            </a:solidFill>
+            <a:prstDash val="solid"/>
+          </a:ln>
+        </p:spPr>
+        <p:txBody>
+          <a:bodyPr/>
+          <a:p/>
+        </p:txBody>
+      </p:sp>
+      <p:sp>
+        <p:nvSpPr>
+          <p:cNvPr id="17" name="Text 14"/>
+          <p:cNvSpPr txBox="1"/>
+          <p:nvPr/>
+        </p:nvSpPr>
+        <p:spPr>
+          <a:xfrm>
+            <a:off x="8328965" y="1847088"/>
+            <a:ext cx="3112922" cy="219456"/>
+          </a:xfrm>
+          <a:prstGeom prst="rect">
+            <a:avLst/>
+          </a:prstGeom>
+          <a:noFill/>
+          <a:ln/>
+        </p:spPr>
+        <p:txBody>
+          <a:bodyPr wrap="square" lIns="0" tIns="0" rIns="0" bIns="0" rtlCol="0" anchor="t"/>
+          <a:lstStyle/>
+          <a:p>
+            <a:pPr indent="0" marL="0">
+              <a:buNone/>
+            </a:pPr>
+            <a:r>
+              <a:rPr lang="en-US" sz="950" b="1" dirty="0">
+                <a:solidFill>
+                  <a:srgbClr val="006A76"/>
+                </a:solidFill>
+                <a:latin typeface="Pretendard" pitchFamily="34" charset="0"/>
+                <a:ea typeface="Pretendard" pitchFamily="34" charset="-122"/>
+                <a:cs typeface="Pretendard" pitchFamily="34" charset="-120"/>
+              </a:rPr>
+              <a:t>Q6</a:t>
+            </a:r>
+            <a:endParaRPr lang="en-US" sz="950" dirty="0"/>
+          </a:p>
+        </p:txBody>
+      </p:sp>
+      <p:sp>
+        <p:nvSpPr>
+          <p:cNvPr id="18" name="Text 15"/>
+          <p:cNvSpPr txBox="1"/>
+          <p:nvPr/>
+        </p:nvSpPr>
+        <p:spPr>
+          <a:xfrm>
+            <a:off x="8328965" y="2103120"/>
+            <a:ext cx="3112922" cy="566928"/>
+          </a:xfrm>
+          <a:prstGeom prst="rect">
+            <a:avLst/>
+          </a:prstGeom>
+          <a:noFill/>
+          <a:ln/>
+        </p:spPr>
+        <p:txBody>
+          <a:bodyPr wrap="square" lIns="0" tIns="0" rIns="0" bIns="0" rtlCol="0" anchor="t"/>
+          <a:lstStyle/>
+          <a:p>
+            <a:pPr indent="0" marL="0">
+              <a:buNone/>
+            </a:pPr>
+            <a:r>
+              <a:rPr lang="en-US" sz="1400" b="1" dirty="0">
+                <a:solidFill>
+                  <a:srgbClr val="333F48"/>
+                </a:solidFill>
+                <a:latin typeface="Pretendard" pitchFamily="34" charset="0"/>
+                <a:ea typeface="Pretendard" pitchFamily="34" charset="-122"/>
+                <a:cs typeface="Pretendard" pitchFamily="34" charset="-120"/>
+              </a:rPr>
+              <a:t>앞으로 어떻게 개선하나요?</a:t>
+            </a:r>
+            <a:endParaRPr lang="en-US" sz="1400" dirty="0"/>
+          </a:p>
+        </p:txBody>
+      </p:sp>
+      <p:sp>
+        <p:nvSpPr>
+          <p:cNvPr id="19" name="Text 16"/>
+          <p:cNvSpPr txBox="1"/>
+          <p:nvPr/>
+        </p:nvSpPr>
+        <p:spPr>
+          <a:xfrm>
+            <a:off x="8328965" y="2724912"/>
+            <a:ext cx="3112922" cy="2039112"/>
+          </a:xfrm>
+          <a:prstGeom prst="rect">
+            <a:avLst/>
+          </a:prstGeom>
+          <a:noFill/>
+          <a:ln/>
+        </p:spPr>
+        <p:txBody>
+          <a:bodyPr wrap="square" lIns="0" tIns="0" rIns="0" bIns="0" rtlCol="0" anchor="t"/>
+          <a:lstStyle/>
+          <a:p>
+            <a:pPr indent="0" marL="0">
+              <a:lnSpc>
+                <a:spcPct val="125000"/>
+              </a:lnSpc>
+              <a:spcAft>
+                <a:spcPts val="400"/>
+              </a:spcAft>
+              <a:buNone/>
+            </a:pPr>
+            <a:r>
+              <a:rPr lang="en-US" sz="1150" dirty="0">
+                <a:solidFill>
+                  <a:srgbClr val="333F48"/>
+                </a:solidFill>
+                <a:latin typeface="Pretendard" pitchFamily="34" charset="0"/>
+                <a:ea typeface="Pretendard" pitchFamily="34" charset="-122"/>
+                <a:cs typeface="Pretendard" pitchFamily="34" charset="-120"/>
+              </a:rPr>
+              <a:t>1) 실제 현장 데이터로 재검증 2) 시험 결과가 쌓일 때마다 다시 학습 3) 20시간 용량 일치율을 90% 이상으로 높이기</a:t>
             </a:r>
             <a:endParaRPr lang="en-US" sz="1150" dirty="0"/>
           </a:p>
@@ -6847,7 +7991,7 @@
                 <a:ea typeface="Pretendard" pitchFamily="34" charset="-122"/>
                 <a:cs typeface="Pretendard" pitchFamily="34" charset="-120"/>
               </a:rPr>
-              <a:t>2 / 13</a:t>
+              <a:t>2 / 15</a:t>
             </a:r>
             <a:endParaRPr lang="en-US" sz="900" dirty="0"/>
           </a:p>
@@ -6925,7 +8069,7 @@
                 <a:ea typeface="Pretendard" pitchFamily="34" charset="-122"/>
                 <a:cs typeface="Pretendard" pitchFamily="34" charset="-120"/>
               </a:rPr>
-              <a:t>직접 발표 → 영상 → 직접 발표, 합계 약 3분 45초(직접 발표는 짧게)</a:t>
+              <a:t>직접 발표 → 영상(용어 설명 + 본편) → 직접 발표, 합계 약 4분 40초</a:t>
             </a:r>
             <a:endParaRPr lang="en-US" sz="1400" dirty="0"/>
           </a:p>
@@ -7208,7 +8352,7 @@
                 <a:ea typeface="Pretendard" pitchFamily="34" charset="-122"/>
                 <a:cs typeface="Pretendard" pitchFamily="34" charset="-120"/>
               </a:rPr>
-              <a:t>왜 필요한가</a:t>
+              <a:t>현재와 개선, 만든 과정</a:t>
             </a:r>
             <a:endParaRPr lang="en-US" sz="1250" dirty="0"/>
           </a:p>
@@ -7250,7 +8394,7 @@
                 <a:ea typeface="Pretendard" pitchFamily="34" charset="-122"/>
                 <a:cs typeface="Pretendard" pitchFamily="34" charset="-120"/>
               </a:rPr>
-              <a:t>직접 발표 25초</a:t>
+              <a:t>직접 발표 45초 · As-Is → To-Be → 만든 3단계</a:t>
             </a:r>
             <a:endParaRPr lang="en-US" sz="1000" dirty="0"/>
           </a:p>
@@ -7318,7 +8462,7 @@
                 <a:ea typeface="Pretendard" pitchFamily="34" charset="-122"/>
                 <a:cs typeface="Pretendard" pitchFamily="34" charset="-120"/>
               </a:rPr>
-              <a:t>0:40</a:t>
+              <a:t>1:00</a:t>
             </a:r>
             <a:endParaRPr lang="en-US" sz="1100" dirty="0"/>
           </a:p>
@@ -7399,7 +8543,7 @@
                 <a:ea typeface="Pretendard" pitchFamily="34" charset="-122"/>
                 <a:cs typeface="Pretendard" pitchFamily="34" charset="-120"/>
               </a:rPr>
-              <a:t>설계 · 95% · 시연 · 추가 기능 · 확장 예측 · 정리 2분 37초</a:t>
+              <a:t>용어 설명(그림·3D) 약 45초 + 설계 · 95% · 시연 · 추가 기능 · 확장 예측 · 정리 2분 37초 = 3분 22초</a:t>
             </a:r>
             <a:endParaRPr lang="en-US" sz="1000" dirty="0"/>
           </a:p>
@@ -7467,7 +8611,7 @@
                 <a:ea typeface="Pretendard" pitchFamily="34" charset="-122"/>
                 <a:cs typeface="Pretendard" pitchFamily="34" charset="-120"/>
               </a:rPr>
-              <a:t>3:17</a:t>
+              <a:t>4:22</a:t>
             </a:r>
             <a:endParaRPr lang="en-US" sz="1100" dirty="0"/>
           </a:p>
@@ -7506,7 +8650,7 @@
                 <a:ea typeface="Pretendard" pitchFamily="34" charset="-122"/>
                 <a:cs typeface="Pretendard" pitchFamily="34" charset="-120"/>
               </a:rPr>
-              <a:t>부족한 점·앞으로</a:t>
+              <a:t>앞으로·마무리</a:t>
             </a:r>
             <a:endParaRPr lang="en-US" sz="1250" dirty="0"/>
           </a:p>
@@ -7548,7 +8692,7 @@
                 <a:ea typeface="Pretendard" pitchFamily="34" charset="-122"/>
                 <a:cs typeface="Pretendard" pitchFamily="34" charset="-120"/>
               </a:rPr>
-              <a:t>직접 발표 25초</a:t>
+              <a:t>직접 발표 15초</a:t>
             </a:r>
             <a:endParaRPr lang="en-US" sz="1000" dirty="0"/>
           </a:p>
@@ -7721,7 +8865,7 @@
                 <a:ea typeface="Pretendard" pitchFamily="34" charset="-122"/>
                 <a:cs typeface="Pretendard" pitchFamily="34" charset="-120"/>
               </a:rPr>
-              <a:t>3 / 13</a:t>
+              <a:t>3 / 15</a:t>
             </a:r>
             <a:endParaRPr lang="en-US" sz="900" dirty="0"/>
           </a:p>
@@ -8107,7 +9251,7 @@
                 <a:ea typeface="Pretendard" pitchFamily="34" charset="-122"/>
                 <a:cs typeface="Pretendard" pitchFamily="34" charset="-120"/>
               </a:rPr>
-              <a:t>합격인지 불합격인지를 95% 맞혔고, 어떻게 만들었고 무엇이 부족한지 보여드리겠습니다.</a:t>
+              <a:t>합격인지 불합격인지를 95% 맞혔고, 어떻게 만들었고 어떤 결과가 나왔는지 보여드리겠습니다.</a:t>
             </a:r>
             <a:endParaRPr lang="en-US" sz="1150" dirty="0"/>
           </a:p>
@@ -8350,7 +9494,7 @@
                 <a:ea typeface="Pretendard" pitchFamily="34" charset="-122"/>
                 <a:cs typeface="Pretendard" pitchFamily="34" charset="-120"/>
               </a:rPr>
-              <a:t>4 / 13</a:t>
+              <a:t>4 / 15</a:t>
             </a:r>
             <a:endParaRPr lang="en-US" sz="900" dirty="0"/>
           </a:p>
@@ -8389,7 +9533,7 @@
                 <a:ea typeface="Pretendard" pitchFamily="34" charset="-122"/>
                 <a:cs typeface="Pretendard" pitchFamily="34" charset="-120"/>
               </a:rPr>
-              <a:t>2. 왜 필요한가</a:t>
+              <a:t>2. 현재(As-Is)와 개선(To-Be), 만든 과정</a:t>
             </a:r>
             <a:endParaRPr lang="en-US" sz="2600" dirty="0"/>
           </a:p>
@@ -8428,7 +9572,7 @@
                 <a:ea typeface="Pretendard" pitchFamily="34" charset="-122"/>
                 <a:cs typeface="Pretendard" pitchFamily="34" charset="-120"/>
               </a:rPr>
-              <a:t>시험 결과를 기다리는 동안에도 제품은 계속 만들어진다</a:t>
+              <a:t>SPC로 데이터는 들어오지만 사람이 직접 분석해 오래 걸린다 → 올리기만 하면 포화도부터 제품 성능까지 확인</a:t>
             </a:r>
             <a:endParaRPr lang="en-US" sz="1400" dirty="0"/>
           </a:p>
@@ -8537,7 +9681,7 @@
                 <a:ea typeface="Pretendard" pitchFamily="34" charset="-122"/>
                 <a:cs typeface="Pretendard" pitchFamily="34" charset="-120"/>
               </a:rPr>
-              <a:t>앞부분</a:t>
+              <a:t>현재 (As-Is)</a:t>
             </a:r>
             <a:endParaRPr lang="en-US" sz="1400" dirty="0"/>
           </a:p>
@@ -8582,7 +9726,7 @@
                 <a:ea typeface="Pretendard" pitchFamily="34" charset="-122"/>
                 <a:cs typeface="Pretendard" pitchFamily="34" charset="-120"/>
               </a:rPr>
-              <a:t>배터리 성능인 20시간 용량과 저온 시동 성능은 시험이 끝나야 알 수 있고, 그동안에도 같은 조건의 제품은 계속 만들어집니다.</a:t>
+              <a:t>지금 공장에서는 SPC로 공정 데이터가 계속 들어오지만, 이를 사람이 직접 분석해야 해서 시간이 많이 걸립니다. 게다가 20시간 용량과 저온 시동 성능은 시험이 끝나야 알 수 있어, 미달이 나올 때는 같은 조건의 제품이 이미 많이 만들어진 뒤입니다.</a:t>
             </a:r>
             <a:endParaRPr lang="en-US" sz="1150" dirty="0"/>
           </a:p>
@@ -8691,7 +9835,7 @@
                 <a:ea typeface="Pretendard" pitchFamily="34" charset="-122"/>
                 <a:cs typeface="Pretendard" pitchFamily="34" charset="-120"/>
               </a:rPr>
-              <a:t>끝부분</a:t>
+              <a:t>개선 (To-Be) · 만든 과정</a:t>
             </a:r>
             <a:endParaRPr lang="en-US" sz="1400" dirty="0"/>
           </a:p>
@@ -8736,7 +9880,7 @@
                 <a:ea typeface="Pretendard" pitchFamily="34" charset="-122"/>
                 <a:cs typeface="Pretendard" pitchFamily="34" charset="-120"/>
               </a:rPr>
-              <a:t>미달이 나오면 이미 많이 만든 뒤입니다. 그래서 시험을 기다리지 않고, 만들 때의 조건만으로 미리 알 수 없을까 생각했습니다.</a:t>
+              <a:t>그래서 데이터를 올리기만 하면 포화도부터 제품 성능까지 확인하는 프로그램을 만들었습니다. 만든 순서는 세 단계입니다. 공정 데이터와 시험 결과를 로트 번호로 잇고, 조건이 포화도와 성능에 주는 영향을 계산하고, 처음 보는 데이터로 검증했습니다. 먼저 영상에서 용어부터 짚겠습니다.</a:t>
             </a:r>
             <a:endParaRPr lang="en-US" sz="1150" dirty="0"/>
           </a:p>
@@ -8806,7 +9950,7 @@
                 <a:ea typeface="Pretendard" pitchFamily="34" charset="-122"/>
                 <a:cs typeface="Pretendard" pitchFamily="34" charset="-120"/>
               </a:rPr>
-              <a:t>화면 — 시험 대기 도식</a:t>
+              <a:t>화면 — As-Is(SPC → 수기 분석, 시간 소요) vs To-Be(업로드 → 자동 분석) 비교 도식</a:t>
             </a:r>
             <a:endParaRPr lang="en-US" sz="1250" dirty="0"/>
           </a:p>
@@ -8821,6 +9965,782 @@
 </file>
 
 <file path=ppt/slides/slide5.xml><?xml version="1.0" encoding="utf-8"?>
+<p:sld xmlns:a="http://schemas.openxmlformats.org/drawingml/2006/main" xmlns:p="http://schemas.openxmlformats.org/presentationml/2006/main" xmlns:r="http://schemas.openxmlformats.org/officeDocument/2006/relationships">
+  <p:cSld>
+    <p:bg>
+      <p:bgPr>
+        <a:solidFill>
+          <a:srgbClr val="FFFFFF"/>
+        </a:solidFill>
+      </p:bgPr>
+    </p:bg>
+    <p:spTree>
+      <p:nvGrpSpPr>
+        <p:cNvPr id="1" name=""/>
+        <p:cNvGrpSpPr/>
+        <p:nvPr/>
+      </p:nvGrpSpPr>
+      <p:grpSpPr/>
+      <p:pic>
+        <p:nvPicPr>
+          <p:cNvPr id="2" name="Image 0" descr="/Users/junny_macbook/.claude/skills/sebang-deck/assets/sebang_wordmark_dark.png">    </p:cNvPr>
+          <p:cNvPicPr>
+            <a:picLocks noChangeAspect="1"/>
+          </p:cNvPicPr>
+          <p:nvPr/>
+        </p:nvPicPr>
+        <p:blipFill>
+          <a:blip r:embed="rId2"/>
+          <a:stretch>
+            <a:fillRect/>
+          </a:stretch>
+        </p:blipFill>
+        <p:spPr>
+          <a:xfrm>
+            <a:off x="548640" y="292608"/>
+            <a:ext cx="868680" cy="185801"/>
+          </a:xfrm>
+          <a:prstGeom prst="rect">
+            <a:avLst/>
+          </a:prstGeom>
+        </p:spPr>
+      </p:pic>
+      <p:sp>
+        <p:nvSpPr>
+          <p:cNvPr id="3" name="Text 0"/>
+          <p:cNvSpPr txBox="1"/>
+          <p:nvPr/>
+        </p:nvSpPr>
+        <p:spPr>
+          <a:xfrm>
+            <a:off x="1572768" y="256032"/>
+            <a:ext cx="5486400" cy="274320"/>
+          </a:xfrm>
+          <a:prstGeom prst="rect">
+            <a:avLst/>
+          </a:prstGeom>
+          <a:noFill/>
+          <a:ln/>
+        </p:spPr>
+        <p:txBody>
+          <a:bodyPr wrap="square" lIns="0" tIns="0" rIns="0" bIns="0" rtlCol="0" anchor="ctr"/>
+          <a:lstStyle/>
+          <a:p>
+            <a:pPr indent="0" marL="0">
+              <a:buNone/>
+            </a:pPr>
+            <a:r>
+              <a:rPr lang="en-US" sz="950" dirty="0">
+                <a:solidFill>
+                  <a:srgbClr val="717779"/>
+                </a:solidFill>
+                <a:latin typeface="Pretendard" pitchFamily="34" charset="0"/>
+                <a:ea typeface="Pretendard" pitchFamily="34" charset="-122"/>
+                <a:cs typeface="Pretendard" pitchFamily="34" charset="-120"/>
+              </a:rPr>
+              <a:t>창원품질경영팀 · 임원 보고</a:t>
+            </a:r>
+            <a:endParaRPr lang="en-US" sz="950" dirty="0"/>
+          </a:p>
+        </p:txBody>
+      </p:sp>
+      <p:sp>
+        <p:nvSpPr>
+          <p:cNvPr id="4" name="Text 1"/>
+          <p:cNvSpPr txBox="1"/>
+          <p:nvPr/>
+        </p:nvSpPr>
+        <p:spPr>
+          <a:xfrm>
+            <a:off x="548640" y="6400800"/>
+            <a:ext cx="7315200" cy="228600"/>
+          </a:xfrm>
+          <a:prstGeom prst="rect">
+            <a:avLst/>
+          </a:prstGeom>
+          <a:noFill/>
+          <a:ln/>
+        </p:spPr>
+        <p:txBody>
+          <a:bodyPr wrap="square" lIns="0" tIns="0" rIns="0" bIns="0" rtlCol="0" anchor="ctr"/>
+          <a:lstStyle/>
+          <a:p>
+            <a:pPr indent="0" marL="0">
+              <a:buNone/>
+            </a:pPr>
+            <a:r>
+              <a:rPr lang="en-US" sz="900" dirty="0">
+                <a:solidFill>
+                  <a:srgbClr val="717779"/>
+                </a:solidFill>
+                <a:latin typeface="Pretendard" pitchFamily="34" charset="0"/>
+                <a:ea typeface="Pretendard" pitchFamily="34" charset="-122"/>
+                <a:cs typeface="Pretendard" pitchFamily="34" charset="-120"/>
+              </a:rPr>
+              <a:t>창원품질경영팀 김경준 주임  ·  AI 포화도 예측  ·  발표 대본</a:t>
+            </a:r>
+            <a:endParaRPr lang="en-US" sz="900" dirty="0"/>
+          </a:p>
+        </p:txBody>
+      </p:sp>
+      <p:sp>
+        <p:nvSpPr>
+          <p:cNvPr id="5" name="Text 2"/>
+          <p:cNvSpPr txBox="1"/>
+          <p:nvPr/>
+        </p:nvSpPr>
+        <p:spPr>
+          <a:xfrm>
+            <a:off x="10545775" y="6400800"/>
+            <a:ext cx="1097280" cy="228600"/>
+          </a:xfrm>
+          <a:prstGeom prst="rect">
+            <a:avLst/>
+          </a:prstGeom>
+          <a:noFill/>
+          <a:ln/>
+        </p:spPr>
+        <p:txBody>
+          <a:bodyPr wrap="square" lIns="0" tIns="0" rIns="0" bIns="0" rtlCol="0" anchor="ctr"/>
+          <a:lstStyle/>
+          <a:p>
+            <a:pPr algn="r" indent="0" marL="0">
+              <a:buNone/>
+            </a:pPr>
+            <a:r>
+              <a:rPr lang="en-US" sz="900" dirty="0">
+                <a:solidFill>
+                  <a:srgbClr val="717779"/>
+                </a:solidFill>
+                <a:latin typeface="Pretendard" pitchFamily="34" charset="0"/>
+                <a:ea typeface="Pretendard" pitchFamily="34" charset="-122"/>
+                <a:cs typeface="Pretendard" pitchFamily="34" charset="-120"/>
+              </a:rPr>
+              <a:t>5 / 15</a:t>
+            </a:r>
+            <a:endParaRPr lang="en-US" sz="900" dirty="0"/>
+          </a:p>
+        </p:txBody>
+      </p:sp>
+      <p:sp>
+        <p:nvSpPr>
+          <p:cNvPr id="6" name="Text 3"/>
+          <p:cNvSpPr txBox="1"/>
+          <p:nvPr/>
+        </p:nvSpPr>
+        <p:spPr>
+          <a:xfrm>
+            <a:off x="548640" y="658368"/>
+            <a:ext cx="11094415" cy="493776"/>
+          </a:xfrm>
+          <a:prstGeom prst="rect">
+            <a:avLst/>
+          </a:prstGeom>
+          <a:noFill/>
+          <a:ln/>
+        </p:spPr>
+        <p:txBody>
+          <a:bodyPr wrap="square" lIns="0" tIns="0" rIns="0" bIns="0" rtlCol="0" anchor="ctr"/>
+          <a:lstStyle/>
+          <a:p>
+            <a:pPr indent="0" marL="0">
+              <a:buNone/>
+            </a:pPr>
+            <a:r>
+              <a:rPr lang="en-US" sz="2600" b="1" dirty="0">
+                <a:solidFill>
+                  <a:srgbClr val="333F48"/>
+                </a:solidFill>
+                <a:latin typeface="Pretendard" pitchFamily="34" charset="0"/>
+                <a:ea typeface="Pretendard" pitchFamily="34" charset="-122"/>
+                <a:cs typeface="Pretendard" pitchFamily="34" charset="-120"/>
+              </a:rPr>
+              <a:t>2-2. 영상 앞부분: 용어 설명 (그림·3D)</a:t>
+            </a:r>
+            <a:endParaRPr lang="en-US" sz="2600" dirty="0"/>
+          </a:p>
+        </p:txBody>
+      </p:sp>
+      <p:sp>
+        <p:nvSpPr>
+          <p:cNvPr id="7" name="Text 4"/>
+          <p:cNvSpPr txBox="1"/>
+          <p:nvPr/>
+        </p:nvSpPr>
+        <p:spPr>
+          <a:xfrm>
+            <a:off x="548640" y="1152144"/>
+            <a:ext cx="11094415" cy="329184"/>
+          </a:xfrm>
+          <a:prstGeom prst="rect">
+            <a:avLst/>
+          </a:prstGeom>
+          <a:noFill/>
+          <a:ln/>
+        </p:spPr>
+        <p:txBody>
+          <a:bodyPr wrap="square" lIns="0" tIns="0" rIns="0" bIns="0" rtlCol="0" anchor="ctr"/>
+          <a:lstStyle/>
+          <a:p>
+            <a:pPr indent="0" marL="0">
+              <a:buNone/>
+            </a:pPr>
+            <a:r>
+              <a:rPr lang="en-US" sz="1400" b="1" dirty="0">
+                <a:solidFill>
+                  <a:srgbClr val="006A76"/>
+                </a:solidFill>
+                <a:latin typeface="Pretendard" pitchFamily="34" charset="0"/>
+                <a:ea typeface="Pretendard" pitchFamily="34" charset="-122"/>
+                <a:cs typeface="Pretendard" pitchFamily="34" charset="-120"/>
+              </a:rPr>
+              <a:t>처음 듣는 임원도 이해하도록 AGM 배터리 · 포화도(왜 중요한지까지) · 20시간 용량 · 저온 시동 성능을 그림으로 먼저 설명한다</a:t>
+            </a:r>
+            <a:endParaRPr lang="en-US" sz="1400" dirty="0"/>
+          </a:p>
+        </p:txBody>
+      </p:sp>
+      <p:sp>
+        <p:nvSpPr>
+          <p:cNvPr id="8" name="Shape 5"/>
+          <p:cNvSpPr/>
+          <p:nvPr/>
+        </p:nvSpPr>
+        <p:spPr>
+          <a:xfrm>
+            <a:off x="548640" y="1664208"/>
+            <a:ext cx="3515258" cy="3246120"/>
+          </a:xfrm>
+          <a:prstGeom prst="roundRect">
+            <a:avLst>
+              <a:gd name="adj" fmla="val 2254"/>
+            </a:avLst>
+          </a:prstGeom>
+          <a:solidFill>
+            <a:srgbClr val="FFFFFF"/>
+          </a:solidFill>
+          <a:ln w="9525">
+            <a:solidFill>
+              <a:srgbClr val="D0D0CE"/>
+            </a:solidFill>
+            <a:prstDash val="solid"/>
+          </a:ln>
+        </p:spPr>
+        <p:txBody>
+          <a:bodyPr/>
+          <a:p/>
+        </p:txBody>
+      </p:sp>
+      <p:sp>
+        <p:nvSpPr>
+          <p:cNvPr id="9" name="Text 6"/>
+          <p:cNvSpPr txBox="1"/>
+          <p:nvPr/>
+        </p:nvSpPr>
+        <p:spPr>
+          <a:xfrm>
+            <a:off x="749808" y="1847088"/>
+            <a:ext cx="3112922" cy="219456"/>
+          </a:xfrm>
+          <a:prstGeom prst="rect">
+            <a:avLst/>
+          </a:prstGeom>
+          <a:noFill/>
+          <a:ln/>
+        </p:spPr>
+        <p:txBody>
+          <a:bodyPr wrap="square" lIns="0" tIns="0" rIns="0" bIns="0" rtlCol="0" anchor="t"/>
+          <a:lstStyle/>
+          <a:p>
+            <a:pPr indent="0" marL="0">
+              <a:buNone/>
+            </a:pPr>
+            <a:r>
+              <a:rPr lang="en-US" sz="950" b="1" dirty="0">
+                <a:solidFill>
+                  <a:srgbClr val="006A76"/>
+                </a:solidFill>
+                <a:latin typeface="Pretendard" pitchFamily="34" charset="0"/>
+                <a:ea typeface="Pretendard" pitchFamily="34" charset="-122"/>
+                <a:cs typeface="Pretendard" pitchFamily="34" charset="-120"/>
+              </a:rPr>
+              <a:t>영상 나레이션 · 1/3</a:t>
+            </a:r>
+            <a:endParaRPr lang="en-US" sz="950" dirty="0"/>
+          </a:p>
+        </p:txBody>
+      </p:sp>
+      <p:sp>
+        <p:nvSpPr>
+          <p:cNvPr id="10" name="Text 7"/>
+          <p:cNvSpPr txBox="1"/>
+          <p:nvPr/>
+        </p:nvSpPr>
+        <p:spPr>
+          <a:xfrm>
+            <a:off x="749808" y="2103120"/>
+            <a:ext cx="3112922" cy="566928"/>
+          </a:xfrm>
+          <a:prstGeom prst="rect">
+            <a:avLst/>
+          </a:prstGeom>
+          <a:noFill/>
+          <a:ln/>
+        </p:spPr>
+        <p:txBody>
+          <a:bodyPr wrap="square" lIns="0" tIns="0" rIns="0" bIns="0" rtlCol="0" anchor="t"/>
+          <a:lstStyle/>
+          <a:p>
+            <a:pPr indent="0" marL="0">
+              <a:buNone/>
+            </a:pPr>
+            <a:r>
+              <a:rPr lang="en-US" sz="1400" b="1" dirty="0">
+                <a:solidFill>
+                  <a:srgbClr val="333F48"/>
+                </a:solidFill>
+                <a:latin typeface="Pretendard" pitchFamily="34" charset="0"/>
+                <a:ea typeface="Pretendard" pitchFamily="34" charset="-122"/>
+                <a:cs typeface="Pretendard" pitchFamily="34" charset="-120"/>
+              </a:rPr>
+              <a:t>AGM 배터리</a:t>
+            </a:r>
+            <a:endParaRPr lang="en-US" sz="1400" dirty="0"/>
+          </a:p>
+        </p:txBody>
+      </p:sp>
+      <p:sp>
+        <p:nvSpPr>
+          <p:cNvPr id="11" name="Text 8"/>
+          <p:cNvSpPr txBox="1"/>
+          <p:nvPr/>
+        </p:nvSpPr>
+        <p:spPr>
+          <a:xfrm>
+            <a:off x="749808" y="2724912"/>
+            <a:ext cx="3112922" cy="2039112"/>
+          </a:xfrm>
+          <a:prstGeom prst="rect">
+            <a:avLst/>
+          </a:prstGeom>
+          <a:noFill/>
+          <a:ln/>
+        </p:spPr>
+        <p:txBody>
+          <a:bodyPr wrap="square" lIns="0" tIns="0" rIns="0" bIns="0" rtlCol="0" anchor="t"/>
+          <a:lstStyle/>
+          <a:p>
+            <a:pPr indent="0" marL="0">
+              <a:lnSpc>
+                <a:spcPct val="125000"/>
+              </a:lnSpc>
+              <a:spcAft>
+                <a:spcPts val="400"/>
+              </a:spcAft>
+              <a:buNone/>
+            </a:pPr>
+            <a:r>
+              <a:rPr lang="en-US" sz="1150" dirty="0">
+                <a:solidFill>
+                  <a:srgbClr val="333F48"/>
+                </a:solidFill>
+                <a:latin typeface="Pretendard" pitchFamily="34" charset="0"/>
+                <a:ea typeface="Pretendard" pitchFamily="34" charset="-122"/>
+                <a:cs typeface="Pretendard" pitchFamily="34" charset="-120"/>
+              </a:rPr>
+              <a:t>먼저, 오늘 나오는 용어를 쉽게 짚고 가겠습니다. AGM 배터리는 유리 섬유 판이 전해액을 스펀지처럼 머금고 있는 배터리입니다.</a:t>
+            </a:r>
+            <a:endParaRPr lang="en-US" sz="1150" dirty="0"/>
+          </a:p>
+        </p:txBody>
+      </p:sp>
+      <p:sp>
+        <p:nvSpPr>
+          <p:cNvPr id="12" name="Shape 9"/>
+          <p:cNvSpPr/>
+          <p:nvPr/>
+        </p:nvSpPr>
+        <p:spPr>
+          <a:xfrm>
+            <a:off x="4338218" y="1664208"/>
+            <a:ext cx="3515258" cy="3246120"/>
+          </a:xfrm>
+          <a:prstGeom prst="roundRect">
+            <a:avLst>
+              <a:gd name="adj" fmla="val 2254"/>
+            </a:avLst>
+          </a:prstGeom>
+          <a:solidFill>
+            <a:srgbClr val="FFFFFF"/>
+          </a:solidFill>
+          <a:ln w="9525">
+            <a:solidFill>
+              <a:srgbClr val="D0D0CE"/>
+            </a:solidFill>
+            <a:prstDash val="solid"/>
+          </a:ln>
+        </p:spPr>
+        <p:txBody>
+          <a:bodyPr/>
+          <a:p/>
+        </p:txBody>
+      </p:sp>
+      <p:sp>
+        <p:nvSpPr>
+          <p:cNvPr id="13" name="Text 10"/>
+          <p:cNvSpPr txBox="1"/>
+          <p:nvPr/>
+        </p:nvSpPr>
+        <p:spPr>
+          <a:xfrm>
+            <a:off x="4539386" y="1847088"/>
+            <a:ext cx="3112922" cy="219456"/>
+          </a:xfrm>
+          <a:prstGeom prst="rect">
+            <a:avLst/>
+          </a:prstGeom>
+          <a:noFill/>
+          <a:ln/>
+        </p:spPr>
+        <p:txBody>
+          <a:bodyPr wrap="square" lIns="0" tIns="0" rIns="0" bIns="0" rtlCol="0" anchor="t"/>
+          <a:lstStyle/>
+          <a:p>
+            <a:pPr indent="0" marL="0">
+              <a:buNone/>
+            </a:pPr>
+            <a:r>
+              <a:rPr lang="en-US" sz="950" b="1" dirty="0">
+                <a:solidFill>
+                  <a:srgbClr val="006A76"/>
+                </a:solidFill>
+                <a:latin typeface="Pretendard" pitchFamily="34" charset="0"/>
+                <a:ea typeface="Pretendard" pitchFamily="34" charset="-122"/>
+                <a:cs typeface="Pretendard" pitchFamily="34" charset="-120"/>
+              </a:rPr>
+              <a:t>영상 나레이션 · 2/3</a:t>
+            </a:r>
+            <a:endParaRPr lang="en-US" sz="950" dirty="0"/>
+          </a:p>
+        </p:txBody>
+      </p:sp>
+      <p:sp>
+        <p:nvSpPr>
+          <p:cNvPr id="14" name="Text 11"/>
+          <p:cNvSpPr txBox="1"/>
+          <p:nvPr/>
+        </p:nvSpPr>
+        <p:spPr>
+          <a:xfrm>
+            <a:off x="4539386" y="2103120"/>
+            <a:ext cx="3112922" cy="566928"/>
+          </a:xfrm>
+          <a:prstGeom prst="rect">
+            <a:avLst/>
+          </a:prstGeom>
+          <a:noFill/>
+          <a:ln/>
+        </p:spPr>
+        <p:txBody>
+          <a:bodyPr wrap="square" lIns="0" tIns="0" rIns="0" bIns="0" rtlCol="0" anchor="t"/>
+          <a:lstStyle/>
+          <a:p>
+            <a:pPr indent="0" marL="0">
+              <a:buNone/>
+            </a:pPr>
+            <a:r>
+              <a:rPr lang="en-US" sz="1400" b="1" dirty="0">
+                <a:solidFill>
+                  <a:srgbClr val="333F48"/>
+                </a:solidFill>
+                <a:latin typeface="Pretendard" pitchFamily="34" charset="0"/>
+                <a:ea typeface="Pretendard" pitchFamily="34" charset="-122"/>
+                <a:cs typeface="Pretendard" pitchFamily="34" charset="-120"/>
+              </a:rPr>
+              <a:t>포화도 · 20시간 용량</a:t>
+            </a:r>
+            <a:endParaRPr lang="en-US" sz="1400" dirty="0"/>
+          </a:p>
+        </p:txBody>
+      </p:sp>
+      <p:sp>
+        <p:nvSpPr>
+          <p:cNvPr id="15" name="Text 12"/>
+          <p:cNvSpPr txBox="1"/>
+          <p:nvPr/>
+        </p:nvSpPr>
+        <p:spPr>
+          <a:xfrm>
+            <a:off x="4539386" y="2724912"/>
+            <a:ext cx="3112922" cy="2039112"/>
+          </a:xfrm>
+          <a:prstGeom prst="rect">
+            <a:avLst/>
+          </a:prstGeom>
+          <a:noFill/>
+          <a:ln/>
+        </p:spPr>
+        <p:txBody>
+          <a:bodyPr wrap="square" lIns="0" tIns="0" rIns="0" bIns="0" rtlCol="0" anchor="t"/>
+          <a:lstStyle/>
+          <a:p>
+            <a:pPr indent="0" marL="0">
+              <a:lnSpc>
+                <a:spcPct val="125000"/>
+              </a:lnSpc>
+              <a:spcAft>
+                <a:spcPts val="400"/>
+              </a:spcAft>
+              <a:buNone/>
+            </a:pPr>
+            <a:r>
+              <a:rPr lang="en-US" sz="1150" dirty="0">
+                <a:solidFill>
+                  <a:srgbClr val="333F48"/>
+                </a:solidFill>
+                <a:latin typeface="Pretendard" pitchFamily="34" charset="0"/>
+                <a:ea typeface="Pretendard" pitchFamily="34" charset="-122"/>
+                <a:cs typeface="Pretendard" pitchFamily="34" charset="-120"/>
+              </a:rPr>
+              <a:t>포화도는 이 유리 섬유 판에 전해액이 얼마나 가득 찼는지를 나타내는 비율입니다. 전해액이 부족하면 전기가 흐르는 길이 줄어서, 용량도 저온 시동 성능도 떨어질 수 있습니다. 그래서 포화도는 시험 전에 제품 성능을 미리 가늠하는, 가장 중요한 중간 지표입니다. 20시간 용량은 20시간에 걸쳐 일정하게 꺼내 쓸 수 있는 전기의 양입니다.</a:t>
+            </a:r>
+            <a:endParaRPr lang="en-US" sz="1150" dirty="0"/>
+          </a:p>
+        </p:txBody>
+      </p:sp>
+      <p:sp>
+        <p:nvSpPr>
+          <p:cNvPr id="16" name="Shape 13"/>
+          <p:cNvSpPr/>
+          <p:nvPr/>
+        </p:nvSpPr>
+        <p:spPr>
+          <a:xfrm>
+            <a:off x="8127797" y="1664208"/>
+            <a:ext cx="3515258" cy="3246120"/>
+          </a:xfrm>
+          <a:prstGeom prst="roundRect">
+            <a:avLst>
+              <a:gd name="adj" fmla="val 2254"/>
+            </a:avLst>
+          </a:prstGeom>
+          <a:solidFill>
+            <a:srgbClr val="FFFFFF"/>
+          </a:solidFill>
+          <a:ln w="9525">
+            <a:solidFill>
+              <a:srgbClr val="D0D0CE"/>
+            </a:solidFill>
+            <a:prstDash val="solid"/>
+          </a:ln>
+        </p:spPr>
+        <p:txBody>
+          <a:bodyPr/>
+          <a:p/>
+        </p:txBody>
+      </p:sp>
+      <p:sp>
+        <p:nvSpPr>
+          <p:cNvPr id="17" name="Text 14"/>
+          <p:cNvSpPr txBox="1"/>
+          <p:nvPr/>
+        </p:nvSpPr>
+        <p:spPr>
+          <a:xfrm>
+            <a:off x="8328965" y="1847088"/>
+            <a:ext cx="3112922" cy="219456"/>
+          </a:xfrm>
+          <a:prstGeom prst="rect">
+            <a:avLst/>
+          </a:prstGeom>
+          <a:noFill/>
+          <a:ln/>
+        </p:spPr>
+        <p:txBody>
+          <a:bodyPr wrap="square" lIns="0" tIns="0" rIns="0" bIns="0" rtlCol="0" anchor="t"/>
+          <a:lstStyle/>
+          <a:p>
+            <a:pPr indent="0" marL="0">
+              <a:buNone/>
+            </a:pPr>
+            <a:r>
+              <a:rPr lang="en-US" sz="950" b="1" dirty="0">
+                <a:solidFill>
+                  <a:srgbClr val="006A76"/>
+                </a:solidFill>
+                <a:latin typeface="Pretendard" pitchFamily="34" charset="0"/>
+                <a:ea typeface="Pretendard" pitchFamily="34" charset="-122"/>
+                <a:cs typeface="Pretendard" pitchFamily="34" charset="-120"/>
+              </a:rPr>
+              <a:t>영상 나레이션 · 3/3</a:t>
+            </a:r>
+            <a:endParaRPr lang="en-US" sz="950" dirty="0"/>
+          </a:p>
+        </p:txBody>
+      </p:sp>
+      <p:sp>
+        <p:nvSpPr>
+          <p:cNvPr id="18" name="Text 15"/>
+          <p:cNvSpPr txBox="1"/>
+          <p:nvPr/>
+        </p:nvSpPr>
+        <p:spPr>
+          <a:xfrm>
+            <a:off x="8328965" y="2103120"/>
+            <a:ext cx="3112922" cy="566928"/>
+          </a:xfrm>
+          <a:prstGeom prst="rect">
+            <a:avLst/>
+          </a:prstGeom>
+          <a:noFill/>
+          <a:ln/>
+        </p:spPr>
+        <p:txBody>
+          <a:bodyPr wrap="square" lIns="0" tIns="0" rIns="0" bIns="0" rtlCol="0" anchor="t"/>
+          <a:lstStyle/>
+          <a:p>
+            <a:pPr indent="0" marL="0">
+              <a:buNone/>
+            </a:pPr>
+            <a:r>
+              <a:rPr lang="en-US" sz="1400" b="1" dirty="0">
+                <a:solidFill>
+                  <a:srgbClr val="333F48"/>
+                </a:solidFill>
+                <a:latin typeface="Pretendard" pitchFamily="34" charset="0"/>
+                <a:ea typeface="Pretendard" pitchFamily="34" charset="-122"/>
+                <a:cs typeface="Pretendard" pitchFamily="34" charset="-120"/>
+              </a:rPr>
+              <a:t>저온 시동 성능 (CCA)</a:t>
+            </a:r>
+            <a:endParaRPr lang="en-US" sz="1400" dirty="0"/>
+          </a:p>
+        </p:txBody>
+      </p:sp>
+      <p:sp>
+        <p:nvSpPr>
+          <p:cNvPr id="19" name="Text 16"/>
+          <p:cNvSpPr txBox="1"/>
+          <p:nvPr/>
+        </p:nvSpPr>
+        <p:spPr>
+          <a:xfrm>
+            <a:off x="8328965" y="2724912"/>
+            <a:ext cx="3112922" cy="2039112"/>
+          </a:xfrm>
+          <a:prstGeom prst="rect">
+            <a:avLst/>
+          </a:prstGeom>
+          <a:noFill/>
+          <a:ln/>
+        </p:spPr>
+        <p:txBody>
+          <a:bodyPr wrap="square" lIns="0" tIns="0" rIns="0" bIns="0" rtlCol="0" anchor="t"/>
+          <a:lstStyle/>
+          <a:p>
+            <a:pPr indent="0" marL="0">
+              <a:lnSpc>
+                <a:spcPct val="125000"/>
+              </a:lnSpc>
+              <a:spcAft>
+                <a:spcPts val="400"/>
+              </a:spcAft>
+              <a:buNone/>
+            </a:pPr>
+            <a:r>
+              <a:rPr lang="en-US" sz="1150" dirty="0">
+                <a:solidFill>
+                  <a:srgbClr val="333F48"/>
+                </a:solidFill>
+                <a:latin typeface="Pretendard" pitchFamily="34" charset="0"/>
+                <a:ea typeface="Pretendard" pitchFamily="34" charset="-122"/>
+                <a:cs typeface="Pretendard" pitchFamily="34" charset="-120"/>
+              </a:rPr>
+              <a:t>그리고 저온 시동 성능, CCA는 영하 18도의 추위에서 시동을 거는 힘입니다.</a:t>
+            </a:r>
+            <a:endParaRPr lang="en-US" sz="1150" dirty="0"/>
+          </a:p>
+        </p:txBody>
+      </p:sp>
+      <p:sp>
+        <p:nvSpPr>
+          <p:cNvPr id="20" name="Shape 17"/>
+          <p:cNvSpPr/>
+          <p:nvPr/>
+        </p:nvSpPr>
+        <p:spPr>
+          <a:xfrm>
+            <a:off x="548640" y="5138928"/>
+            <a:ext cx="11094415" cy="566928"/>
+          </a:xfrm>
+          <a:prstGeom prst="roundRect">
+            <a:avLst>
+              <a:gd name="adj" fmla="val 12903"/>
+            </a:avLst>
+          </a:prstGeom>
+          <a:solidFill>
+            <a:srgbClr val="333F48"/>
+          </a:solidFill>
+          <a:ln w="12700">
+            <a:solidFill>
+              <a:srgbClr val="333F48"/>
+            </a:solidFill>
+            <a:prstDash val="solid"/>
+          </a:ln>
+        </p:spPr>
+        <p:txBody>
+          <a:bodyPr/>
+          <a:p/>
+        </p:txBody>
+      </p:sp>
+      <p:sp>
+        <p:nvSpPr>
+          <p:cNvPr id="21" name="Text 18"/>
+          <p:cNvSpPr txBox="1"/>
+          <p:nvPr/>
+        </p:nvSpPr>
+        <p:spPr>
+          <a:xfrm>
+            <a:off x="822960" y="5138928"/>
+            <a:ext cx="10545775" cy="566928"/>
+          </a:xfrm>
+          <a:prstGeom prst="rect">
+            <a:avLst/>
+          </a:prstGeom>
+          <a:noFill/>
+          <a:ln/>
+        </p:spPr>
+        <p:txBody>
+          <a:bodyPr wrap="square" lIns="0" tIns="0" rIns="0" bIns="0" rtlCol="0" anchor="ctr"/>
+          <a:lstStyle/>
+          <a:p>
+            <a:pPr indent="0" marL="0">
+              <a:buNone/>
+            </a:pPr>
+            <a:r>
+              <a:rPr lang="en-US" sz="1250" b="1" dirty="0">
+                <a:solidFill>
+                  <a:srgbClr val="FFFFFF"/>
+                </a:solidFill>
+                <a:latin typeface="Pretendard" pitchFamily="34" charset="0"/>
+                <a:ea typeface="Pretendard" pitchFamily="34" charset="-122"/>
+                <a:cs typeface="Pretendard" pitchFamily="34" charset="-120"/>
+              </a:rPr>
+              <a:t>화면 — AGM 3D 단면 → 스펀지에 전해액이 차오르는 포화도(가득/부족 비교, 성능 막대) → 20시간 방전 링 → 영하 18℃ 눈·시동 힘</a:t>
+            </a:r>
+            <a:endParaRPr lang="en-US" sz="1250" dirty="0"/>
+          </a:p>
+        </p:txBody>
+      </p:sp>
+    </p:spTree>
+  </p:cSld>
+  <p:clrMapOvr>
+    <a:masterClrMapping/>
+  </p:clrMapOvr>
+</p:sld>
+</file>
+
+<file path=ppt/slides/slide6.xml><?xml version="1.0" encoding="utf-8"?>
 <p:sld xmlns:a="http://schemas.openxmlformats.org/drawingml/2006/main" xmlns:r="http://schemas.openxmlformats.org/officeDocument/2006/relationships" xmlns:p="http://schemas.openxmlformats.org/presentationml/2006/main">
   <p:cSld name="Slide 5">
     <p:bg>
@@ -8979,7 +10899,7 @@
                 <a:ea typeface="Pretendard" pitchFamily="34" charset="-122"/>
                 <a:cs typeface="Pretendard" pitchFamily="34" charset="-120"/>
               </a:rPr>
-              <a:t>5 / 13</a:t>
+              <a:t>6 / 15</a:t>
             </a:r>
             <a:endParaRPr lang="en-US" sz="900" dirty="0"/>
           </a:p>
@@ -9603,7 +11523,7 @@
 </p:sld>
 </file>
 
-<file path=ppt/slides/slide6.xml><?xml version="1.0" encoding="utf-8"?>
+<file path=ppt/slides/slide7.xml><?xml version="1.0" encoding="utf-8"?>
 <p:sld xmlns:a="http://schemas.openxmlformats.org/drawingml/2006/main" xmlns:r="http://schemas.openxmlformats.org/officeDocument/2006/relationships" xmlns:p="http://schemas.openxmlformats.org/presentationml/2006/main">
   <p:cSld name="Slide 6">
     <p:bg>
@@ -9762,7 +11682,7 @@
                 <a:ea typeface="Pretendard" pitchFamily="34" charset="-122"/>
                 <a:cs typeface="Pretendard" pitchFamily="34" charset="-120"/>
               </a:rPr>
-              <a:t>6 / 13</a:t>
+              <a:t>7 / 15</a:t>
             </a:r>
             <a:endParaRPr lang="en-US" sz="900" dirty="0"/>
           </a:p>
@@ -10386,7 +12306,7 @@
 </p:sld>
 </file>
 
-<file path=ppt/slides/slide7.xml><?xml version="1.0" encoding="utf-8"?>
+<file path=ppt/slides/slide8.xml><?xml version="1.0" encoding="utf-8"?>
 <p:sld xmlns:a="http://schemas.openxmlformats.org/drawingml/2006/main" xmlns:r="http://schemas.openxmlformats.org/officeDocument/2006/relationships" xmlns:p="http://schemas.openxmlformats.org/presentationml/2006/main">
   <p:cSld name="Slide 7">
     <p:bg>
@@ -10545,7 +12465,7 @@
                 <a:ea typeface="Pretendard" pitchFamily="34" charset="-122"/>
                 <a:cs typeface="Pretendard" pitchFamily="34" charset="-120"/>
               </a:rPr>
-              <a:t>7 / 13</a:t>
+              <a:t>8 / 15</a:t>
             </a:r>
             <a:endParaRPr lang="en-US" sz="900" dirty="0"/>
           </a:p>
@@ -11015,7 +12935,7 @@
 </p:sld>
 </file>
 
-<file path=ppt/slides/slide8.xml><?xml version="1.0" encoding="utf-8"?>
+<file path=ppt/slides/slide9.xml><?xml version="1.0" encoding="utf-8"?>
 <p:sld xmlns:a="http://schemas.openxmlformats.org/drawingml/2006/main" xmlns:p="http://schemas.openxmlformats.org/presentationml/2006/main" xmlns:r="http://schemas.openxmlformats.org/officeDocument/2006/relationships">
   <p:cSld>
     <p:spTree>
@@ -11160,7 +13080,7 @@
                 <a:ea typeface="Pretendard" pitchFamily="34" charset="-122"/>
                 <a:cs typeface="Pretendard" pitchFamily="34" charset="-120"/>
               </a:rPr>
-              <a:t>8 / 13</a:t>
+              <a:t>9 / 15</a:t>
             </a:r>
             <a:endParaRPr lang="en-US" sz="900" dirty="0"/>
           </a:p>
@@ -11771,635 +13691,6 @@
                 <a:cs typeface="Pretendard" pitchFamily="34" charset="-120"/>
               </a:rPr>
               <a:t>화면 — 실제 웹앱 녹화(업로드 미리보기 · 분석 실행 · 상세 분석 · 미달 원인 · 형명별)</a:t>
-            </a:r>
-            <a:endParaRPr lang="en-US" sz="1250" dirty="0"/>
-          </a:p>
-        </p:txBody>
-      </p:sp>
-    </p:spTree>
-  </p:cSld>
-  <p:clrMapOvr>
-    <a:masterClrMapping/>
-  </p:clrMapOvr>
-</p:sld>
-</file>
-
-<file path=ppt/slides/slide9.xml><?xml version="1.0" encoding="utf-8"?>
-<p:sld xmlns:a="http://schemas.openxmlformats.org/drawingml/2006/main" xmlns:r="http://schemas.openxmlformats.org/officeDocument/2006/relationships" xmlns:p="http://schemas.openxmlformats.org/presentationml/2006/main">
-  <p:cSld name="Slide 8">
-    <p:bg>
-      <p:bgPr>
-        <a:solidFill>
-          <a:srgbClr val="FFFFFF"/>
-        </a:solidFill>
-      </p:bgPr>
-    </p:bg>
-    <p:spTree>
-      <p:nvGrpSpPr>
-        <p:cNvPr id="1" name=""/>
-        <p:cNvGrpSpPr/>
-        <p:nvPr/>
-      </p:nvGrpSpPr>
-      <p:grpSpPr>
-        <a:xfrm>
-          <a:off x="0" y="0"/>
-          <a:ext cx="0" cy="0"/>
-          <a:chOff x="0" y="0"/>
-          <a:chExt cx="0" cy="0"/>
-        </a:xfrm>
-      </p:grpSpPr>
-      <p:pic>
-        <p:nvPicPr>
-          <p:cNvPr id="2" name="Image 0" descr="/Users/junny_macbook/.claude/skills/sebang-deck/assets/sebang_wordmark_dark.png">    </p:cNvPr>
-          <p:cNvPicPr>
-            <a:picLocks noChangeAspect="1"/>
-          </p:cNvPicPr>
-          <p:nvPr/>
-        </p:nvPicPr>
-        <p:blipFill>
-          <a:blip r:embed="rId1"/>
-          <a:stretch>
-            <a:fillRect/>
-          </a:stretch>
-        </p:blipFill>
-        <p:spPr>
-          <a:xfrm>
-            <a:off x="548640" y="292608"/>
-            <a:ext cx="868680" cy="185801"/>
-          </a:xfrm>
-          <a:prstGeom prst="rect">
-            <a:avLst/>
-          </a:prstGeom>
-        </p:spPr>
-      </p:pic>
-      <p:sp>
-        <p:nvSpPr>
-          <p:cNvPr id="3" name="Text 0"/>
-          <p:cNvSpPr txBox="1"/>
-          <p:nvPr/>
-        </p:nvSpPr>
-        <p:spPr>
-          <a:xfrm>
-            <a:off x="1572768" y="256032"/>
-            <a:ext cx="5486400" cy="274320"/>
-          </a:xfrm>
-          <a:prstGeom prst="rect">
-            <a:avLst/>
-          </a:prstGeom>
-          <a:noFill/>
-          <a:ln/>
-        </p:spPr>
-        <p:txBody>
-          <a:bodyPr wrap="square" lIns="0" tIns="0" rIns="0" bIns="0" rtlCol="0" anchor="ctr"/>
-          <a:lstStyle/>
-          <a:p>
-            <a:pPr indent="0" marL="0">
-              <a:buNone/>
-            </a:pPr>
-            <a:r>
-              <a:rPr lang="en-US" sz="950" dirty="0">
-                <a:solidFill>
-                  <a:srgbClr val="717779"/>
-                </a:solidFill>
-                <a:latin typeface="Pretendard" pitchFamily="34" charset="0"/>
-                <a:ea typeface="Pretendard" pitchFamily="34" charset="-122"/>
-                <a:cs typeface="Pretendard" pitchFamily="34" charset="-120"/>
-              </a:rPr>
-              <a:t>창원품질경영팀 · 임원 보고</a:t>
-            </a:r>
-            <a:endParaRPr lang="en-US" sz="950" dirty="0"/>
-          </a:p>
-        </p:txBody>
-      </p:sp>
-      <p:sp>
-        <p:nvSpPr>
-          <p:cNvPr id="4" name="Text 1"/>
-          <p:cNvSpPr txBox="1"/>
-          <p:nvPr/>
-        </p:nvSpPr>
-        <p:spPr>
-          <a:xfrm>
-            <a:off x="548640" y="6400800"/>
-            <a:ext cx="7315200" cy="228600"/>
-          </a:xfrm>
-          <a:prstGeom prst="rect">
-            <a:avLst/>
-          </a:prstGeom>
-          <a:noFill/>
-          <a:ln/>
-        </p:spPr>
-        <p:txBody>
-          <a:bodyPr wrap="square" lIns="0" tIns="0" rIns="0" bIns="0" rtlCol="0" anchor="ctr"/>
-          <a:lstStyle/>
-          <a:p>
-            <a:pPr indent="0" marL="0">
-              <a:buNone/>
-            </a:pPr>
-            <a:r>
-              <a:rPr lang="en-US" sz="900" dirty="0">
-                <a:solidFill>
-                  <a:srgbClr val="717779"/>
-                </a:solidFill>
-                <a:latin typeface="Pretendard" pitchFamily="34" charset="0"/>
-                <a:ea typeface="Pretendard" pitchFamily="34" charset="-122"/>
-                <a:cs typeface="Pretendard" pitchFamily="34" charset="-120"/>
-              </a:rPr>
-              <a:t>창원품질경영팀 김경준 주임  ·  AI 포화도 예측  ·  발표 대본</a:t>
-            </a:r>
-            <a:endParaRPr lang="en-US" sz="900" dirty="0"/>
-          </a:p>
-        </p:txBody>
-      </p:sp>
-      <p:sp>
-        <p:nvSpPr>
-          <p:cNvPr id="5" name="Text 2"/>
-          <p:cNvSpPr txBox="1"/>
-          <p:nvPr/>
-        </p:nvSpPr>
-        <p:spPr>
-          <a:xfrm>
-            <a:off x="10545775" y="6400800"/>
-            <a:ext cx="1097280" cy="228600"/>
-          </a:xfrm>
-          <a:prstGeom prst="rect">
-            <a:avLst/>
-          </a:prstGeom>
-          <a:noFill/>
-          <a:ln/>
-        </p:spPr>
-        <p:txBody>
-          <a:bodyPr wrap="square" lIns="0" tIns="0" rIns="0" bIns="0" rtlCol="0" anchor="ctr"/>
-          <a:lstStyle/>
-          <a:p>
-            <a:pPr algn="r" indent="0" marL="0">
-              <a:buNone/>
-            </a:pPr>
-            <a:r>
-              <a:rPr lang="en-US" sz="900" dirty="0">
-                <a:solidFill>
-                  <a:srgbClr val="717779"/>
-                </a:solidFill>
-                <a:latin typeface="Pretendard" pitchFamily="34" charset="0"/>
-                <a:ea typeface="Pretendard" pitchFamily="34" charset="-122"/>
-                <a:cs typeface="Pretendard" pitchFamily="34" charset="-120"/>
-              </a:rPr>
-              <a:t>9 / 13</a:t>
-            </a:r>
-            <a:endParaRPr lang="en-US" sz="900" dirty="0"/>
-          </a:p>
-        </p:txBody>
-      </p:sp>
-      <p:sp>
-        <p:nvSpPr>
-          <p:cNvPr id="6" name="Text 3"/>
-          <p:cNvSpPr txBox="1"/>
-          <p:nvPr/>
-        </p:nvSpPr>
-        <p:spPr>
-          <a:xfrm>
-            <a:off x="548640" y="658368"/>
-            <a:ext cx="11094415" cy="493776"/>
-          </a:xfrm>
-          <a:prstGeom prst="rect">
-            <a:avLst/>
-          </a:prstGeom>
-          <a:noFill/>
-          <a:ln/>
-        </p:spPr>
-        <p:txBody>
-          <a:bodyPr wrap="square" lIns="0" tIns="0" rIns="0" bIns="0" rtlCol="0" anchor="ctr"/>
-          <a:lstStyle/>
-          <a:p>
-            <a:pPr indent="0" marL="0">
-              <a:buNone/>
-            </a:pPr>
-            <a:r>
-              <a:rPr lang="en-US" sz="2600" b="1" dirty="0">
-                <a:solidFill>
-                  <a:srgbClr val="333F48"/>
-                </a:solidFill>
-                <a:latin typeface="Pretendard" pitchFamily="34" charset="0"/>
-                <a:ea typeface="Pretendard" pitchFamily="34" charset="-122"/>
-                <a:cs typeface="Pretendard" pitchFamily="34" charset="-120"/>
-              </a:rPr>
-              <a:t>6. 시험 없이 나머지 로트까지 (확장 예측)</a:t>
-            </a:r>
-            <a:endParaRPr lang="en-US" sz="2600" dirty="0"/>
-          </a:p>
-        </p:txBody>
-      </p:sp>
-      <p:sp>
-        <p:nvSpPr>
-          <p:cNvPr id="7" name="Text 4"/>
-          <p:cNvSpPr txBox="1"/>
-          <p:nvPr/>
-        </p:nvSpPr>
-        <p:spPr>
-          <a:xfrm>
-            <a:off x="548640" y="1152144"/>
-            <a:ext cx="11094415" cy="329184"/>
-          </a:xfrm>
-          <a:prstGeom prst="rect">
-            <a:avLst/>
-          </a:prstGeom>
-          <a:noFill/>
-          <a:ln/>
-        </p:spPr>
-        <p:txBody>
-          <a:bodyPr wrap="square" lIns="0" tIns="0" rIns="0" bIns="0" rtlCol="0" anchor="ctr"/>
-          <a:lstStyle/>
-          <a:p>
-            <a:pPr indent="0" marL="0">
-              <a:buNone/>
-            </a:pPr>
-            <a:r>
-              <a:rPr lang="en-US" sz="1400" b="1" dirty="0">
-                <a:solidFill>
-                  <a:srgbClr val="006A76"/>
-                </a:solidFill>
-                <a:latin typeface="Pretendard" pitchFamily="34" charset="0"/>
-                <a:ea typeface="Pretendard" pitchFamily="34" charset="-122"/>
-                <a:cs typeface="Pretendard" pitchFamily="34" charset="-120"/>
-              </a:rPr>
-              <a:t>시험을 여러 번 돌리지 않아도 전체 로트의 결과를 한 번에 확인한다</a:t>
-            </a:r>
-            <a:endParaRPr lang="en-US" sz="1400" dirty="0"/>
-          </a:p>
-        </p:txBody>
-      </p:sp>
-      <p:sp>
-        <p:nvSpPr>
-          <p:cNvPr id="8" name="Shape 5"/>
-          <p:cNvSpPr/>
-          <p:nvPr/>
-        </p:nvSpPr>
-        <p:spPr>
-          <a:xfrm>
-            <a:off x="548640" y="1664208"/>
-            <a:ext cx="5410048" cy="3246120"/>
-          </a:xfrm>
-          <a:prstGeom prst="roundRect">
-            <a:avLst>
-              <a:gd name="adj" fmla="val 2254"/>
-            </a:avLst>
-          </a:prstGeom>
-          <a:solidFill>
-            <a:srgbClr val="FFFFFF"/>
-          </a:solidFill>
-          <a:ln w="9525">
-            <a:solidFill>
-              <a:srgbClr val="D0D0CE"/>
-            </a:solidFill>
-            <a:prstDash val="solid"/>
-          </a:ln>
-        </p:spPr>
-        <p:txBody>
-          <a:bodyPr/>
-          <a:p/>
-        </p:txBody>
-      </p:sp>
-      <p:sp>
-        <p:nvSpPr>
-          <p:cNvPr id="9" name="Text 6"/>
-          <p:cNvSpPr txBox="1"/>
-          <p:nvPr/>
-        </p:nvSpPr>
-        <p:spPr>
-          <a:xfrm>
-            <a:off x="749808" y="1847088"/>
-            <a:ext cx="5007712" cy="219456"/>
-          </a:xfrm>
-          <a:prstGeom prst="rect">
-            <a:avLst/>
-          </a:prstGeom>
-          <a:noFill/>
-          <a:ln/>
-        </p:spPr>
-        <p:txBody>
-          <a:bodyPr wrap="square" lIns="0" tIns="0" rIns="0" bIns="0" rtlCol="0" anchor="t"/>
-          <a:lstStyle/>
-          <a:p>
-            <a:pPr indent="0" marL="0">
-              <a:buNone/>
-            </a:pPr>
-            <a:r>
-              <a:rPr lang="en-US" sz="950" b="1" dirty="0">
-                <a:solidFill>
-                  <a:srgbClr val="006A76"/>
-                </a:solidFill>
-                <a:latin typeface="Pretendard" pitchFamily="34" charset="0"/>
-                <a:ea typeface="Pretendard" pitchFamily="34" charset="-122"/>
-                <a:cs typeface="Pretendard" pitchFamily="34" charset="-120"/>
-              </a:rPr>
-              <a:t>영상 나레이션 · 1/2</a:t>
-            </a:r>
-            <a:endParaRPr lang="en-US" sz="950" dirty="0"/>
-          </a:p>
-        </p:txBody>
-      </p:sp>
-      <p:sp>
-        <p:nvSpPr>
-          <p:cNvPr id="10" name="Text 7"/>
-          <p:cNvSpPr txBox="1"/>
-          <p:nvPr/>
-        </p:nvSpPr>
-        <p:spPr>
-          <a:xfrm>
-            <a:off x="749808" y="2103120"/>
-            <a:ext cx="5007712" cy="566928"/>
-          </a:xfrm>
-          <a:prstGeom prst="rect">
-            <a:avLst/>
-          </a:prstGeom>
-          <a:noFill/>
-          <a:ln/>
-        </p:spPr>
-        <p:txBody>
-          <a:bodyPr wrap="square" lIns="0" tIns="0" rIns="0" bIns="0" rtlCol="0" anchor="t"/>
-          <a:lstStyle/>
-          <a:p>
-            <a:pPr indent="0" marL="0">
-              <a:buNone/>
-            </a:pPr>
-            <a:r>
-              <a:rPr lang="en-US" sz="1400" b="1" dirty="0">
-                <a:solidFill>
-                  <a:srgbClr val="333F48"/>
-                </a:solidFill>
-                <a:latin typeface="Pretendard" pitchFamily="34" charset="0"/>
-                <a:ea typeface="Pretendard" pitchFamily="34" charset="-122"/>
-                <a:cs typeface="Pretendard" pitchFamily="34" charset="-120"/>
-              </a:rPr>
-              <a:t>앞부분</a:t>
-            </a:r>
-            <a:endParaRPr lang="en-US" sz="1400" dirty="0"/>
-          </a:p>
-        </p:txBody>
-      </p:sp>
-      <p:sp>
-        <p:nvSpPr>
-          <p:cNvPr id="11" name="Text 8"/>
-          <p:cNvSpPr txBox="1"/>
-          <p:nvPr/>
-        </p:nvSpPr>
-        <p:spPr>
-          <a:xfrm>
-            <a:off x="749808" y="2724912"/>
-            <a:ext cx="5007712" cy="2039112"/>
-          </a:xfrm>
-          <a:prstGeom prst="rect">
-            <a:avLst/>
-          </a:prstGeom>
-          <a:noFill/>
-          <a:ln/>
-        </p:spPr>
-        <p:txBody>
-          <a:bodyPr wrap="square" lIns="0" tIns="0" rIns="0" bIns="0" rtlCol="0" anchor="t"/>
-          <a:lstStyle/>
-          <a:p>
-            <a:pPr indent="0" marL="0">
-              <a:lnSpc>
-                <a:spcPct val="125000"/>
-              </a:lnSpc>
-              <a:spcAft>
-                <a:spcPts val="400"/>
-              </a:spcAft>
-              <a:buNone/>
-            </a:pPr>
-            <a:r>
-              <a:rPr lang="en-US" sz="1150" dirty="0">
-                <a:solidFill>
-                  <a:srgbClr val="333F48"/>
-                </a:solidFill>
-                <a:latin typeface="Pretendard" pitchFamily="34" charset="0"/>
-                <a:ea typeface="Pretendard" pitchFamily="34" charset="-122"/>
-                <a:cs typeface="Pretendard" pitchFamily="34" charset="-120"/>
-              </a:rPr>
-              <a:t>그리고 이것이 가장 큰 장점입니다. 성능 시험을 마친 제품으로 학습해서, 아직 시험하지 않은 나머지 로트의 20시간 용량까지 미리 예측합니다.</a:t>
-            </a:r>
-            <a:endParaRPr lang="en-US" sz="1150" dirty="0"/>
-          </a:p>
-        </p:txBody>
-      </p:sp>
-      <p:sp>
-        <p:nvSpPr>
-          <p:cNvPr id="12" name="Shape 9"/>
-          <p:cNvSpPr/>
-          <p:nvPr/>
-        </p:nvSpPr>
-        <p:spPr>
-          <a:xfrm>
-            <a:off x="6233008" y="1664208"/>
-            <a:ext cx="5410048" cy="3246120"/>
-          </a:xfrm>
-          <a:prstGeom prst="roundRect">
-            <a:avLst>
-              <a:gd name="adj" fmla="val 2254"/>
-            </a:avLst>
-          </a:prstGeom>
-          <a:solidFill>
-            <a:srgbClr val="FFFFFF"/>
-          </a:solidFill>
-          <a:ln w="9525">
-            <a:solidFill>
-              <a:srgbClr val="D0D0CE"/>
-            </a:solidFill>
-            <a:prstDash val="solid"/>
-          </a:ln>
-        </p:spPr>
-        <p:txBody>
-          <a:bodyPr/>
-          <a:p/>
-        </p:txBody>
-      </p:sp>
-      <p:sp>
-        <p:nvSpPr>
-          <p:cNvPr id="13" name="Text 10"/>
-          <p:cNvSpPr txBox="1"/>
-          <p:nvPr/>
-        </p:nvSpPr>
-        <p:spPr>
-          <a:xfrm>
-            <a:off x="6434176" y="1847088"/>
-            <a:ext cx="5007712" cy="219456"/>
-          </a:xfrm>
-          <a:prstGeom prst="rect">
-            <a:avLst/>
-          </a:prstGeom>
-          <a:noFill/>
-          <a:ln/>
-        </p:spPr>
-        <p:txBody>
-          <a:bodyPr wrap="square" lIns="0" tIns="0" rIns="0" bIns="0" rtlCol="0" anchor="t"/>
-          <a:lstStyle/>
-          <a:p>
-            <a:pPr indent="0" marL="0">
-              <a:buNone/>
-            </a:pPr>
-            <a:r>
-              <a:rPr lang="en-US" sz="950" b="1" dirty="0">
-                <a:solidFill>
-                  <a:srgbClr val="006A76"/>
-                </a:solidFill>
-                <a:latin typeface="Pretendard" pitchFamily="34" charset="0"/>
-                <a:ea typeface="Pretendard" pitchFamily="34" charset="-122"/>
-                <a:cs typeface="Pretendard" pitchFamily="34" charset="-120"/>
-              </a:rPr>
-              <a:t>영상 나레이션 · 2/2</a:t>
-            </a:r>
-            <a:endParaRPr lang="en-US" sz="950" dirty="0"/>
-          </a:p>
-        </p:txBody>
-      </p:sp>
-      <p:sp>
-        <p:nvSpPr>
-          <p:cNvPr id="14" name="Text 11"/>
-          <p:cNvSpPr txBox="1"/>
-          <p:nvPr/>
-        </p:nvSpPr>
-        <p:spPr>
-          <a:xfrm>
-            <a:off x="6434176" y="2103120"/>
-            <a:ext cx="5007712" cy="566928"/>
-          </a:xfrm>
-          <a:prstGeom prst="rect">
-            <a:avLst/>
-          </a:prstGeom>
-          <a:noFill/>
-          <a:ln/>
-        </p:spPr>
-        <p:txBody>
-          <a:bodyPr wrap="square" lIns="0" tIns="0" rIns="0" bIns="0" rtlCol="0" anchor="t"/>
-          <a:lstStyle/>
-          <a:p>
-            <a:pPr indent="0" marL="0">
-              <a:buNone/>
-            </a:pPr>
-            <a:r>
-              <a:rPr lang="en-US" sz="1400" b="1" dirty="0">
-                <a:solidFill>
-                  <a:srgbClr val="333F48"/>
-                </a:solidFill>
-                <a:latin typeface="Pretendard" pitchFamily="34" charset="0"/>
-                <a:ea typeface="Pretendard" pitchFamily="34" charset="-122"/>
-                <a:cs typeface="Pretendard" pitchFamily="34" charset="-120"/>
-              </a:rPr>
-              <a:t>끝부분</a:t>
-            </a:r>
-            <a:endParaRPr lang="en-US" sz="1400" dirty="0"/>
-          </a:p>
-        </p:txBody>
-      </p:sp>
-      <p:sp>
-        <p:nvSpPr>
-          <p:cNvPr id="15" name="Text 12"/>
-          <p:cNvSpPr txBox="1"/>
-          <p:nvPr/>
-        </p:nvSpPr>
-        <p:spPr>
-          <a:xfrm>
-            <a:off x="6434176" y="2724912"/>
-            <a:ext cx="5007712" cy="2039112"/>
-          </a:xfrm>
-          <a:prstGeom prst="rect">
-            <a:avLst/>
-          </a:prstGeom>
-          <a:noFill/>
-          <a:ln/>
-        </p:spPr>
-        <p:txBody>
-          <a:bodyPr wrap="square" lIns="0" tIns="0" rIns="0" bIns="0" rtlCol="0" anchor="t"/>
-          <a:lstStyle/>
-          <a:p>
-            <a:pPr indent="0" marL="0">
-              <a:lnSpc>
-                <a:spcPct val="125000"/>
-              </a:lnSpc>
-              <a:spcAft>
-                <a:spcPts val="400"/>
-              </a:spcAft>
-              <a:buNone/>
-            </a:pPr>
-            <a:r>
-              <a:rPr lang="en-US" sz="1150" dirty="0">
-                <a:solidFill>
-                  <a:srgbClr val="333F48"/>
-                </a:solidFill>
-                <a:latin typeface="Pretendard" pitchFamily="34" charset="0"/>
-                <a:ea typeface="Pretendard" pitchFamily="34" charset="-122"/>
-                <a:cs typeface="Pretendard" pitchFamily="34" charset="-120"/>
-              </a:rPr>
-              <a:t>그래서 시험을 여러 번 돌리지 않아도, 공정 데이터만 올리면 전체 로트의 결과를 한 번에 확인할 수 있습니다.</a:t>
-            </a:r>
-            <a:endParaRPr lang="en-US" sz="1150" dirty="0"/>
-          </a:p>
-        </p:txBody>
-      </p:sp>
-      <p:sp>
-        <p:nvSpPr>
-          <p:cNvPr id="16" name="Shape 13"/>
-          <p:cNvSpPr/>
-          <p:nvPr/>
-        </p:nvSpPr>
-        <p:spPr>
-          <a:xfrm>
-            <a:off x="548640" y="5138928"/>
-            <a:ext cx="11094415" cy="566928"/>
-          </a:xfrm>
-          <a:prstGeom prst="roundRect">
-            <a:avLst>
-              <a:gd name="adj" fmla="val 12903"/>
-            </a:avLst>
-          </a:prstGeom>
-          <a:solidFill>
-            <a:srgbClr val="333F48"/>
-          </a:solidFill>
-          <a:ln w="12700">
-            <a:solidFill>
-              <a:srgbClr val="333F48"/>
-            </a:solidFill>
-            <a:prstDash val="solid"/>
-          </a:ln>
-        </p:spPr>
-        <p:txBody>
-          <a:bodyPr/>
-          <a:p/>
-        </p:txBody>
-      </p:sp>
-      <p:sp>
-        <p:nvSpPr>
-          <p:cNvPr id="17" name="Text 14"/>
-          <p:cNvSpPr txBox="1"/>
-          <p:nvPr/>
-        </p:nvSpPr>
-        <p:spPr>
-          <a:xfrm>
-            <a:off x="822960" y="5138928"/>
-            <a:ext cx="10545775" cy="566928"/>
-          </a:xfrm>
-          <a:prstGeom prst="rect">
-            <a:avLst/>
-          </a:prstGeom>
-          <a:noFill/>
-          <a:ln/>
-        </p:spPr>
-        <p:txBody>
-          <a:bodyPr wrap="square" lIns="0" tIns="0" rIns="0" bIns="0" rtlCol="0" anchor="ctr"/>
-          <a:lstStyle/>
-          <a:p>
-            <a:pPr indent="0" marL="0">
-              <a:buNone/>
-            </a:pPr>
-            <a:r>
-              <a:rPr lang="en-US" sz="1250" b="1" dirty="0">
-                <a:solidFill>
-                  <a:srgbClr val="FFFFFF"/>
-                </a:solidFill>
-                <a:latin typeface="Pretendard" pitchFamily="34" charset="0"/>
-                <a:ea typeface="Pretendard" pitchFamily="34" charset="-122"/>
-                <a:cs typeface="Pretendard" pitchFamily="34" charset="-120"/>
-              </a:rPr>
-              <a:t>화면 — 300건 학습 → 4,692건 예측 도식 + 시험 전 로트 일괄 예측 화면</a:t>
             </a:r>
             <a:endParaRPr lang="en-US" sz="1250" dirty="0"/>
           </a:p>
